--- a/Slides/slides-127-universal-option.pptx
+++ b/Slides/slides-127-universal-option.pptx
@@ -5,10 +5,10 @@
     <p:sldMasterId id="2147483648" r:id="rId1"/>
   </p:sldMasterIdLst>
   <p:notesMasterIdLst>
-    <p:notesMasterId r:id="rId14"/>
+    <p:notesMasterId r:id="rId19"/>
   </p:notesMasterIdLst>
   <p:handoutMasterIdLst>
-    <p:handoutMasterId r:id="rId15"/>
+    <p:handoutMasterId r:id="rId20"/>
   </p:handoutMasterIdLst>
   <p:sldIdLst>
     <p:sldId id="256" r:id="rId5"/>
@@ -20,6 +20,11 @@
     <p:sldId id="262" r:id="rId11"/>
     <p:sldId id="263" r:id="rId12"/>
     <p:sldId id="264" r:id="rId13"/>
+    <p:sldId id="265" r:id="rId14"/>
+    <p:sldId id="266" r:id="rId15"/>
+    <p:sldId id="267" r:id="rId16"/>
+    <p:sldId id="268" r:id="rId17"/>
+    <p:sldId id="269" r:id="rId18"/>
   </p:sldIdLst>
   <p:sldSz cx="9144000" cy="5143500"/>
   <p:notesSz cx="6858000" cy="9144000"/>
@@ -270,7 +275,7 @@
       </p:grpSpPr>
       <p:sp>
         <p:nvSpPr>
-          <p:cNvPr id="1189449366" name="Header Placeholder 1"/>
+          <p:cNvPr id="1368581194" name="Header Placeholder 1"/>
           <p:cNvSpPr>
             <a:spLocks noGrp="1"/>
           </p:cNvSpPr>
@@ -304,7 +309,7 @@
       </p:sp>
       <p:sp>
         <p:nvSpPr>
-          <p:cNvPr id="517172383" name="Date Placeholder 2"/>
+          <p:cNvPr id="745587399" name="Date Placeholder 2"/>
           <p:cNvSpPr>
             <a:spLocks noGrp="1"/>
           </p:cNvSpPr>
@@ -342,7 +347,7 @@
       </p:sp>
       <p:sp>
         <p:nvSpPr>
-          <p:cNvPr id="1255148706" name="Footer Placeholder 3"/>
+          <p:cNvPr id="1311249943" name="Footer Placeholder 3"/>
           <p:cNvSpPr>
             <a:spLocks noGrp="1"/>
           </p:cNvSpPr>
@@ -376,7 +381,7 @@
       </p:sp>
       <p:sp>
         <p:nvSpPr>
-          <p:cNvPr id="964018444" name="Slide Number Placeholder 4"/>
+          <p:cNvPr id="1628068833" name="Slide Number Placeholder 4"/>
           <p:cNvSpPr>
             <a:spLocks noGrp="1"/>
           </p:cNvSpPr>
@@ -444,7 +449,7 @@
       </p:grpSpPr>
       <p:sp>
         <p:nvSpPr>
-          <p:cNvPr id="1032001523" name="Google Shape;3;n"/>
+          <p:cNvPr id="622180105" name="Google Shape;3;n"/>
           <p:cNvSpPr/>
           <p:nvPr>
             <p:ph type="sldImg" idx="2"/>
@@ -487,7 +492,7 @@
       </p:sp>
       <p:sp>
         <p:nvSpPr>
-          <p:cNvPr id="1294929817" name="Google Shape;4;n"/>
+          <p:cNvPr id="401044768" name="Google Shape;4;n"/>
           <p:cNvSpPr txBox="1"/>
           <p:nvPr>
             <p:ph type="body" idx="1"/>
@@ -990,7 +995,7 @@
       </p:grpSpPr>
       <p:sp>
         <p:nvSpPr>
-          <p:cNvPr id="1639135707" name="Google Shape;79;p1:notes"/>
+          <p:cNvPr id="1138123720" name="Google Shape;79;p1:notes"/>
           <p:cNvSpPr/>
           <p:nvPr>
             <p:ph type="sldImg" idx="2"/>
@@ -1033,7 +1038,7 @@
       </p:sp>
       <p:sp>
         <p:nvSpPr>
-          <p:cNvPr id="363798121" name="Google Shape;80;p1:notes"/>
+          <p:cNvPr id="258522897" name="Google Shape;80;p1:notes"/>
           <p:cNvSpPr txBox="1"/>
           <p:nvPr>
             <p:ph type="body" idx="1"/>
@@ -1084,7 +1089,7 @@
 </p:notes>
 </file>
 
-<file path=ppt/notesSlides/notesSlide2.xml><?xml version="1.0" encoding="utf-8"?>
+<file path=ppt/notesSlides/notesSlide10.xml><?xml version="1.0" encoding="utf-8"?>
 <p:notes xmlns:a="http://schemas.openxmlformats.org/drawingml/2006/main" xmlns:r="http://schemas.openxmlformats.org/officeDocument/2006/relationships" xmlns:p="http://schemas.openxmlformats.org/presentationml/2006/main" xmlns:m="http://schemas.openxmlformats.org/officeDocument/2006/math" xmlns:w="http://schemas.openxmlformats.org/wordprocessingml/2006/main" showMasterSp="1">
   <p:cSld name="">
     <p:spTree>
@@ -1103,7 +1108,7 @@
       </p:grpSpPr>
       <p:sp>
         <p:nvSpPr>
-          <p:cNvPr id="1904761104" name="Google Shape;3;n"/>
+          <p:cNvPr id="614190654" name="Google Shape;3;n"/>
           <p:cNvSpPr/>
           <p:nvPr>
             <p:ph type="sldImg" idx="2"/>
@@ -1142,7 +1147,7 @@
       </p:sp>
       <p:sp>
         <p:nvSpPr>
-          <p:cNvPr id="98295431" name="Google Shape;4;n"/>
+          <p:cNvPr id="913427051" name="Google Shape;4;n"/>
           <p:cNvSpPr txBox="1"/>
           <p:nvPr>
             <p:ph type="body" idx="1"/>
@@ -1170,7 +1175,7 @@
       </p:sp>
       <p:sp>
         <p:nvSpPr>
-          <p:cNvPr id="71638690" name="Slide Number Placeholder 4"/>
+          <p:cNvPr id="1299494137" name="Slide Number Placeholder 4"/>
           <p:cNvSpPr>
             <a:spLocks noGrp="1"/>
           </p:cNvSpPr>
@@ -1181,7 +1186,7 @@
         <p:spPr bwMode="auto">
           <a:xfrm>
             <a:off x="3886200" y="8685212"/>
-            <a:ext cx="2971800" cy="458785"/>
+            <a:ext cx="2971800" cy="458786"/>
           </a:xfrm>
           <a:prstGeom prst="rect">
             <a:avLst/>
@@ -1198,9 +1203,9 @@
             <a:pPr>
               <a:defRPr/>
             </a:pPr>
-            <a:fld id="{C1463F64-9561-2FD5-5416-82C13993CB34}" type="slidenum">
+            <a:fld id="{C960D52C-4C11-5B14-7995-4AFFB546A3A3}" type="slidenum">
               <a:rPr/>
-              <a:t>2</a:t>
+              <a:t/>
             </a:fld>
             <a:endParaRPr/>
           </a:p>
@@ -1214,7 +1219,7 @@
 </p:notes>
 </file>
 
-<file path=ppt/notesSlides/notesSlide3.xml><?xml version="1.0" encoding="utf-8"?>
+<file path=ppt/notesSlides/notesSlide11.xml><?xml version="1.0" encoding="utf-8"?>
 <p:notes xmlns:a="http://schemas.openxmlformats.org/drawingml/2006/main" xmlns:r="http://schemas.openxmlformats.org/officeDocument/2006/relationships" xmlns:p="http://schemas.openxmlformats.org/presentationml/2006/main" xmlns:m="http://schemas.openxmlformats.org/officeDocument/2006/math" xmlns:w="http://schemas.openxmlformats.org/wordprocessingml/2006/main" showMasterSp="1">
   <p:cSld name="">
     <p:spTree>
@@ -1233,7 +1238,7 @@
       </p:grpSpPr>
       <p:sp>
         <p:nvSpPr>
-          <p:cNvPr id="1443647121" name="Google Shape;3;n"/>
+          <p:cNvPr id="771583839" name="Google Shape;3;n"/>
           <p:cNvSpPr/>
           <p:nvPr>
             <p:ph type="sldImg" idx="2"/>
@@ -1272,7 +1277,7 @@
       </p:sp>
       <p:sp>
         <p:nvSpPr>
-          <p:cNvPr id="79545491" name="Google Shape;4;n"/>
+          <p:cNvPr id="419943813" name="Google Shape;4;n"/>
           <p:cNvSpPr txBox="1"/>
           <p:nvPr>
             <p:ph type="body" idx="1"/>
@@ -1300,7 +1305,7 @@
       </p:sp>
       <p:sp>
         <p:nvSpPr>
-          <p:cNvPr id="449219949" name="Slide Number Placeholder 4"/>
+          <p:cNvPr id="1286798372" name="Slide Number Placeholder 4"/>
           <p:cNvSpPr>
             <a:spLocks noGrp="1"/>
           </p:cNvSpPr>
@@ -1328,7 +1333,7 @@
             <a:pPr>
               <a:defRPr/>
             </a:pPr>
-            <a:fld id="{0F94FFC8-6335-F355-B151-E871A3E3BA0D}" type="slidenum">
+            <a:fld id="{1DDD50ED-9221-B28C-626A-9C21D918C551}" type="slidenum">
               <a:rPr/>
               <a:t/>
             </a:fld>
@@ -1344,7 +1349,7 @@
 </p:notes>
 </file>
 
-<file path=ppt/notesSlides/notesSlide4.xml><?xml version="1.0" encoding="utf-8"?>
+<file path=ppt/notesSlides/notesSlide12.xml><?xml version="1.0" encoding="utf-8"?>
 <p:notes xmlns:a="http://schemas.openxmlformats.org/drawingml/2006/main" xmlns:r="http://schemas.openxmlformats.org/officeDocument/2006/relationships" xmlns:p="http://schemas.openxmlformats.org/presentationml/2006/main" xmlns:m="http://schemas.openxmlformats.org/officeDocument/2006/math" xmlns:w="http://schemas.openxmlformats.org/wordprocessingml/2006/main" showMasterSp="1">
   <p:cSld name="">
     <p:spTree>
@@ -1363,7 +1368,7 @@
       </p:grpSpPr>
       <p:sp>
         <p:nvSpPr>
-          <p:cNvPr id="648355082" name="Google Shape;3;n"/>
+          <p:cNvPr id="807795317" name="Google Shape;3;n"/>
           <p:cNvSpPr/>
           <p:nvPr>
             <p:ph type="sldImg" idx="2"/>
@@ -1402,7 +1407,7 @@
       </p:sp>
       <p:sp>
         <p:nvSpPr>
-          <p:cNvPr id="1323327394" name="Google Shape;4;n"/>
+          <p:cNvPr id="805712904" name="Google Shape;4;n"/>
           <p:cNvSpPr txBox="1"/>
           <p:nvPr>
             <p:ph type="body" idx="1"/>
@@ -1430,7 +1435,640 @@
       </p:sp>
       <p:sp>
         <p:nvSpPr>
-          <p:cNvPr id="1151283300" name="Slide Number Placeholder 4"/>
+          <p:cNvPr id="409087229" name="Slide Number Placeholder 4"/>
+          <p:cNvSpPr>
+            <a:spLocks noGrp="1"/>
+          </p:cNvSpPr>
+          <p:nvPr>
+            <p:ph type="sldNum" sz="quarter" idx="3"/>
+          </p:nvPr>
+        </p:nvSpPr>
+        <p:spPr bwMode="auto">
+          <a:xfrm>
+            <a:off x="3886200" y="8685212"/>
+            <a:ext cx="2971800" cy="458786"/>
+          </a:xfrm>
+          <a:prstGeom prst="rect">
+            <a:avLst/>
+          </a:prstGeom>
+        </p:spPr>
+        <p:txBody>
+          <a:bodyPr vert="horz" lIns="91440" tIns="45720" rIns="91440" bIns="45720" anchor="b"/>
+          <a:lstStyle>
+            <a:lvl1pPr algn="r">
+              <a:defRPr sz="1200"/>
+            </a:lvl1pPr>
+          </a:lstStyle>
+          <a:p>
+            <a:pPr>
+              <a:defRPr/>
+            </a:pPr>
+            <a:fld id="{2B0B9E0B-B2C4-6447-BBE9-A448A3D24767}" type="slidenum">
+              <a:rPr/>
+              <a:t/>
+            </a:fld>
+            <a:endParaRPr/>
+          </a:p>
+        </p:txBody>
+      </p:sp>
+    </p:spTree>
+  </p:cSld>
+  <p:clrMapOvr>
+    <a:masterClrMapping/>
+  </p:clrMapOvr>
+</p:notes>
+</file>
+
+<file path=ppt/notesSlides/notesSlide13.xml><?xml version="1.0" encoding="utf-8"?>
+<p:notes xmlns:a="http://schemas.openxmlformats.org/drawingml/2006/main" xmlns:r="http://schemas.openxmlformats.org/officeDocument/2006/relationships" xmlns:p="http://schemas.openxmlformats.org/presentationml/2006/main" xmlns:m="http://schemas.openxmlformats.org/officeDocument/2006/math" xmlns:w="http://schemas.openxmlformats.org/wordprocessingml/2006/main" showMasterPhAnim="0" showMasterSp="0">
+  <p:cSld name="">
+    <p:spTree>
+      <p:nvGrpSpPr>
+        <p:cNvPr id="1" name=""/>
+        <p:cNvGrpSpPr/>
+        <p:nvPr/>
+      </p:nvGrpSpPr>
+      <p:grpSpPr bwMode="auto">
+        <a:xfrm>
+          <a:off x="0" y="0"/>
+          <a:ext cx="0" cy="0"/>
+          <a:chOff x="0" y="0"/>
+          <a:chExt cx="0" cy="0"/>
+        </a:xfrm>
+      </p:grpSpPr>
+      <p:sp>
+        <p:nvSpPr>
+          <p:cNvPr id="1288899046" name="Google Shape;79;p1:notes"/>
+          <p:cNvSpPr/>
+          <p:nvPr>
+            <p:ph type="sldImg" idx="2"/>
+          </p:nvPr>
+        </p:nvSpPr>
+        <p:spPr bwMode="auto">
+          <a:xfrm>
+            <a:off x="380998" y="685800"/>
+            <a:ext cx="6095998" cy="3429000"/>
+          </a:xfrm>
+          <a:custGeom>
+            <a:avLst/>
+            <a:gdLst/>
+            <a:ahLst/>
+            <a:cxnLst/>
+            <a:rect l="l" t="t" r="r" b="b"/>
+            <a:pathLst>
+              <a:path w="120000" h="120000" fill="norm" stroke="1" extrusionOk="0">
+                <a:moveTo>
+                  <a:pt x="0" y="0"/>
+                </a:moveTo>
+                <a:lnTo>
+                  <a:pt x="120000" y="0"/>
+                </a:lnTo>
+                <a:lnTo>
+                  <a:pt x="120000" y="120000"/>
+                </a:lnTo>
+                <a:lnTo>
+                  <a:pt x="0" y="120000"/>
+                </a:lnTo>
+                <a:close/>
+              </a:path>
+            </a:pathLst>
+          </a:custGeom>
+          <a:noFill/>
+          <a:ln>
+            <a:noFill/>
+          </a:ln>
+        </p:spPr>
+      </p:sp>
+      <p:sp>
+        <p:nvSpPr>
+          <p:cNvPr id="202032885" name="Google Shape;80;p1:notes"/>
+          <p:cNvSpPr txBox="1"/>
+          <p:nvPr>
+            <p:ph type="body" idx="1"/>
+          </p:nvPr>
+        </p:nvSpPr>
+        <p:spPr bwMode="auto">
+          <a:xfrm>
+            <a:off x="914400" y="4343400"/>
+            <a:ext cx="5029198" cy="4114800"/>
+          </a:xfrm>
+          <a:prstGeom prst="rect">
+            <a:avLst/>
+          </a:prstGeom>
+          <a:noFill/>
+          <a:ln>
+            <a:noFill/>
+          </a:ln>
+        </p:spPr>
+        <p:txBody>
+          <a:bodyPr spcFirstLastPara="1" wrap="square" lIns="91422" tIns="45698" rIns="91422" bIns="45698" anchor="t" anchorCtr="0">
+            <a:noAutofit/>
+          </a:bodyPr>
+          <a:lstStyle/>
+          <a:p>
+            <a:pPr marL="0" lvl="0" indent="0" algn="l" rtl="0">
+              <a:lnSpc>
+                <a:spcPct val="100000"/>
+              </a:lnSpc>
+              <a:spcBef>
+                <a:spcPts val="0"/>
+              </a:spcBef>
+              <a:spcAft>
+                <a:spcPts val="0"/>
+              </a:spcAft>
+              <a:buSzPts val="1400"/>
+              <a:buNone/>
+              <a:defRPr/>
+            </a:pPr>
+            <a:endParaRPr/>
+          </a:p>
+        </p:txBody>
+      </p:sp>
+    </p:spTree>
+  </p:cSld>
+  <p:clrMapOvr>
+    <a:masterClrMapping/>
+  </p:clrMapOvr>
+</p:notes>
+</file>
+
+<file path=ppt/notesSlides/notesSlide14.xml><?xml version="1.0" encoding="utf-8"?>
+<p:notes xmlns:a="http://schemas.openxmlformats.org/drawingml/2006/main" xmlns:r="http://schemas.openxmlformats.org/officeDocument/2006/relationships" xmlns:p="http://schemas.openxmlformats.org/presentationml/2006/main" xmlns:m="http://schemas.openxmlformats.org/officeDocument/2006/math" xmlns:w="http://schemas.openxmlformats.org/wordprocessingml/2006/main" showMasterSp="1">
+  <p:cSld name="">
+    <p:spTree>
+      <p:nvGrpSpPr>
+        <p:cNvPr id="1" name=""/>
+        <p:cNvGrpSpPr/>
+        <p:nvPr/>
+      </p:nvGrpSpPr>
+      <p:grpSpPr bwMode="auto">
+        <a:xfrm>
+          <a:off x="0" y="0"/>
+          <a:ext cx="0" cy="0"/>
+          <a:chOff x="0" y="0"/>
+          <a:chExt cx="0" cy="0"/>
+        </a:xfrm>
+      </p:grpSpPr>
+      <p:sp>
+        <p:nvSpPr>
+          <p:cNvPr id="185996828" name="Google Shape;3;n"/>
+          <p:cNvSpPr/>
+          <p:nvPr>
+            <p:ph type="sldImg" idx="2"/>
+          </p:nvPr>
+        </p:nvSpPr>
+        <p:spPr bwMode="auto">
+          <a:custGeom>
+            <a:avLst/>
+            <a:gdLst/>
+            <a:ahLst/>
+            <a:cxnLst/>
+            <a:rect l="l" t="t" r="r" b="b"/>
+            <a:pathLst>
+              <a:path w="120000" h="120000" fill="norm" stroke="1" extrusionOk="0">
+                <a:moveTo>
+                  <a:pt x="0" y="0"/>
+                </a:moveTo>
+                <a:lnTo>
+                  <a:pt x="120000" y="0"/>
+                </a:lnTo>
+                <a:lnTo>
+                  <a:pt x="120000" y="120000"/>
+                </a:lnTo>
+                <a:lnTo>
+                  <a:pt x="0" y="120000"/>
+                </a:lnTo>
+                <a:close/>
+              </a:path>
+            </a:pathLst>
+          </a:custGeom>
+          <a:noFill/>
+          <a:ln>
+            <a:noFill/>
+          </a:ln>
+        </p:spPr>
+      </p:sp>
+      <p:sp>
+        <p:nvSpPr>
+          <p:cNvPr id="1386018991" name="Google Shape;4;n"/>
+          <p:cNvSpPr txBox="1"/>
+          <p:nvPr>
+            <p:ph type="body" idx="1"/>
+          </p:nvPr>
+        </p:nvSpPr>
+        <p:spPr bwMode="auto">
+          <a:prstGeom prst="rect">
+            <a:avLst/>
+          </a:prstGeom>
+          <a:noFill/>
+          <a:ln>
+            <a:noFill/>
+          </a:ln>
+        </p:spPr>
+        <p:txBody>
+          <a:bodyPr/>
+          <a:lstStyle/>
+          <a:p>
+            <a:pPr>
+              <a:defRPr/>
+            </a:pPr>
+            <a:endParaRPr/>
+          </a:p>
+        </p:txBody>
+      </p:sp>
+      <p:sp>
+        <p:nvSpPr>
+          <p:cNvPr id="1567295900" name="Slide Number Placeholder 4"/>
+          <p:cNvSpPr>
+            <a:spLocks noGrp="1"/>
+          </p:cNvSpPr>
+          <p:nvPr>
+            <p:ph type="sldNum" sz="quarter" idx="3"/>
+          </p:nvPr>
+        </p:nvSpPr>
+        <p:spPr bwMode="auto">
+          <a:xfrm>
+            <a:off x="3886200" y="8685212"/>
+            <a:ext cx="2971800" cy="458786"/>
+          </a:xfrm>
+          <a:prstGeom prst="rect">
+            <a:avLst/>
+          </a:prstGeom>
+        </p:spPr>
+        <p:txBody>
+          <a:bodyPr vert="horz" lIns="91440" tIns="45720" rIns="91440" bIns="45720" anchor="b"/>
+          <a:lstStyle>
+            <a:lvl1pPr algn="r">
+              <a:defRPr sz="1200"/>
+            </a:lvl1pPr>
+          </a:lstStyle>
+          <a:p>
+            <a:pPr>
+              <a:defRPr/>
+            </a:pPr>
+            <a:fld id="{E050E1B4-CE1D-1D9C-D9A6-212529324C6E}" type="slidenum">
+              <a:rPr/>
+              <a:t/>
+            </a:fld>
+            <a:endParaRPr/>
+          </a:p>
+        </p:txBody>
+      </p:sp>
+    </p:spTree>
+  </p:cSld>
+  <p:clrMapOvr>
+    <a:masterClrMapping/>
+  </p:clrMapOvr>
+</p:notes>
+</file>
+
+<file path=ppt/notesSlides/notesSlide2.xml><?xml version="1.0" encoding="utf-8"?>
+<p:notes xmlns:a="http://schemas.openxmlformats.org/drawingml/2006/main" xmlns:r="http://schemas.openxmlformats.org/officeDocument/2006/relationships" xmlns:p="http://schemas.openxmlformats.org/presentationml/2006/main" xmlns:m="http://schemas.openxmlformats.org/officeDocument/2006/math" xmlns:w="http://schemas.openxmlformats.org/wordprocessingml/2006/main" showMasterSp="1">
+  <p:cSld name="">
+    <p:spTree>
+      <p:nvGrpSpPr>
+        <p:cNvPr id="1" name=""/>
+        <p:cNvGrpSpPr/>
+        <p:nvPr/>
+      </p:nvGrpSpPr>
+      <p:grpSpPr bwMode="auto">
+        <a:xfrm>
+          <a:off x="0" y="0"/>
+          <a:ext cx="0" cy="0"/>
+          <a:chOff x="0" y="0"/>
+          <a:chExt cx="0" cy="0"/>
+        </a:xfrm>
+      </p:grpSpPr>
+      <p:sp>
+        <p:nvSpPr>
+          <p:cNvPr id="1930598843" name="Google Shape;3;n"/>
+          <p:cNvSpPr/>
+          <p:nvPr>
+            <p:ph type="sldImg" idx="2"/>
+          </p:nvPr>
+        </p:nvSpPr>
+        <p:spPr bwMode="auto">
+          <a:custGeom>
+            <a:avLst/>
+            <a:gdLst/>
+            <a:ahLst/>
+            <a:cxnLst/>
+            <a:rect l="l" t="t" r="r" b="b"/>
+            <a:pathLst>
+              <a:path w="120000" h="120000" fill="norm" stroke="1" extrusionOk="0">
+                <a:moveTo>
+                  <a:pt x="0" y="0"/>
+                </a:moveTo>
+                <a:lnTo>
+                  <a:pt x="120000" y="0"/>
+                </a:lnTo>
+                <a:lnTo>
+                  <a:pt x="120000" y="120000"/>
+                </a:lnTo>
+                <a:lnTo>
+                  <a:pt x="0" y="120000"/>
+                </a:lnTo>
+                <a:close/>
+              </a:path>
+            </a:pathLst>
+          </a:custGeom>
+          <a:noFill/>
+          <a:ln>
+            <a:noFill/>
+          </a:ln>
+        </p:spPr>
+      </p:sp>
+      <p:sp>
+        <p:nvSpPr>
+          <p:cNvPr id="485303484" name="Google Shape;4;n"/>
+          <p:cNvSpPr txBox="1"/>
+          <p:nvPr>
+            <p:ph type="body" idx="1"/>
+          </p:nvPr>
+        </p:nvSpPr>
+        <p:spPr bwMode="auto">
+          <a:prstGeom prst="rect">
+            <a:avLst/>
+          </a:prstGeom>
+          <a:noFill/>
+          <a:ln>
+            <a:noFill/>
+          </a:ln>
+        </p:spPr>
+        <p:txBody>
+          <a:bodyPr/>
+          <a:lstStyle/>
+          <a:p>
+            <a:pPr>
+              <a:defRPr/>
+            </a:pPr>
+            <a:endParaRPr/>
+          </a:p>
+        </p:txBody>
+      </p:sp>
+      <p:sp>
+        <p:nvSpPr>
+          <p:cNvPr id="2008748824" name="Slide Number Placeholder 4"/>
+          <p:cNvSpPr>
+            <a:spLocks noGrp="1"/>
+          </p:cNvSpPr>
+          <p:nvPr>
+            <p:ph type="sldNum" sz="quarter" idx="3"/>
+          </p:nvPr>
+        </p:nvSpPr>
+        <p:spPr bwMode="auto">
+          <a:xfrm>
+            <a:off x="3886200" y="8685212"/>
+            <a:ext cx="2971800" cy="458785"/>
+          </a:xfrm>
+          <a:prstGeom prst="rect">
+            <a:avLst/>
+          </a:prstGeom>
+        </p:spPr>
+        <p:txBody>
+          <a:bodyPr vert="horz" lIns="91440" tIns="45720" rIns="91440" bIns="45720" anchor="b"/>
+          <a:lstStyle>
+            <a:lvl1pPr algn="r">
+              <a:defRPr sz="1200"/>
+            </a:lvl1pPr>
+          </a:lstStyle>
+          <a:p>
+            <a:pPr>
+              <a:defRPr/>
+            </a:pPr>
+            <a:fld id="{C1463F64-9561-2FD5-5416-82C13993CB34}" type="slidenum">
+              <a:rPr/>
+              <a:t>2</a:t>
+            </a:fld>
+            <a:endParaRPr/>
+          </a:p>
+        </p:txBody>
+      </p:sp>
+    </p:spTree>
+  </p:cSld>
+  <p:clrMapOvr>
+    <a:masterClrMapping/>
+  </p:clrMapOvr>
+</p:notes>
+</file>
+
+<file path=ppt/notesSlides/notesSlide3.xml><?xml version="1.0" encoding="utf-8"?>
+<p:notes xmlns:a="http://schemas.openxmlformats.org/drawingml/2006/main" xmlns:r="http://schemas.openxmlformats.org/officeDocument/2006/relationships" xmlns:p="http://schemas.openxmlformats.org/presentationml/2006/main" xmlns:m="http://schemas.openxmlformats.org/officeDocument/2006/math" xmlns:w="http://schemas.openxmlformats.org/wordprocessingml/2006/main" showMasterSp="1">
+  <p:cSld name="">
+    <p:spTree>
+      <p:nvGrpSpPr>
+        <p:cNvPr id="1" name=""/>
+        <p:cNvGrpSpPr/>
+        <p:nvPr/>
+      </p:nvGrpSpPr>
+      <p:grpSpPr bwMode="auto">
+        <a:xfrm>
+          <a:off x="0" y="0"/>
+          <a:ext cx="0" cy="0"/>
+          <a:chOff x="0" y="0"/>
+          <a:chExt cx="0" cy="0"/>
+        </a:xfrm>
+      </p:grpSpPr>
+      <p:sp>
+        <p:nvSpPr>
+          <p:cNvPr id="1817538712" name="Google Shape;3;n"/>
+          <p:cNvSpPr/>
+          <p:nvPr>
+            <p:ph type="sldImg" idx="2"/>
+          </p:nvPr>
+        </p:nvSpPr>
+        <p:spPr bwMode="auto">
+          <a:custGeom>
+            <a:avLst/>
+            <a:gdLst/>
+            <a:ahLst/>
+            <a:cxnLst/>
+            <a:rect l="l" t="t" r="r" b="b"/>
+            <a:pathLst>
+              <a:path w="120000" h="120000" fill="norm" stroke="1" extrusionOk="0">
+                <a:moveTo>
+                  <a:pt x="0" y="0"/>
+                </a:moveTo>
+                <a:lnTo>
+                  <a:pt x="120000" y="0"/>
+                </a:lnTo>
+                <a:lnTo>
+                  <a:pt x="120000" y="120000"/>
+                </a:lnTo>
+                <a:lnTo>
+                  <a:pt x="0" y="120000"/>
+                </a:lnTo>
+                <a:close/>
+              </a:path>
+            </a:pathLst>
+          </a:custGeom>
+          <a:noFill/>
+          <a:ln>
+            <a:noFill/>
+          </a:ln>
+        </p:spPr>
+      </p:sp>
+      <p:sp>
+        <p:nvSpPr>
+          <p:cNvPr id="523671010" name="Google Shape;4;n"/>
+          <p:cNvSpPr txBox="1"/>
+          <p:nvPr>
+            <p:ph type="body" idx="1"/>
+          </p:nvPr>
+        </p:nvSpPr>
+        <p:spPr bwMode="auto">
+          <a:prstGeom prst="rect">
+            <a:avLst/>
+          </a:prstGeom>
+          <a:noFill/>
+          <a:ln>
+            <a:noFill/>
+          </a:ln>
+        </p:spPr>
+        <p:txBody>
+          <a:bodyPr/>
+          <a:lstStyle/>
+          <a:p>
+            <a:pPr>
+              <a:defRPr/>
+            </a:pPr>
+            <a:endParaRPr/>
+          </a:p>
+        </p:txBody>
+      </p:sp>
+      <p:sp>
+        <p:nvSpPr>
+          <p:cNvPr id="23318502" name="Slide Number Placeholder 4"/>
+          <p:cNvSpPr>
+            <a:spLocks noGrp="1"/>
+          </p:cNvSpPr>
+          <p:nvPr>
+            <p:ph type="sldNum" sz="quarter" idx="3"/>
+          </p:nvPr>
+        </p:nvSpPr>
+        <p:spPr bwMode="auto">
+          <a:xfrm>
+            <a:off x="3886200" y="8685212"/>
+            <a:ext cx="2971800" cy="458786"/>
+          </a:xfrm>
+          <a:prstGeom prst="rect">
+            <a:avLst/>
+          </a:prstGeom>
+        </p:spPr>
+        <p:txBody>
+          <a:bodyPr vert="horz" lIns="91440" tIns="45720" rIns="91440" bIns="45720" anchor="b"/>
+          <a:lstStyle>
+            <a:lvl1pPr algn="r">
+              <a:defRPr sz="1200"/>
+            </a:lvl1pPr>
+          </a:lstStyle>
+          <a:p>
+            <a:pPr>
+              <a:defRPr/>
+            </a:pPr>
+            <a:fld id="{0F94FFC8-6335-F355-B151-E871A3E3BA0D}" type="slidenum">
+              <a:rPr/>
+              <a:t/>
+            </a:fld>
+            <a:endParaRPr/>
+          </a:p>
+        </p:txBody>
+      </p:sp>
+    </p:spTree>
+  </p:cSld>
+  <p:clrMapOvr>
+    <a:masterClrMapping/>
+  </p:clrMapOvr>
+</p:notes>
+</file>
+
+<file path=ppt/notesSlides/notesSlide4.xml><?xml version="1.0" encoding="utf-8"?>
+<p:notes xmlns:a="http://schemas.openxmlformats.org/drawingml/2006/main" xmlns:r="http://schemas.openxmlformats.org/officeDocument/2006/relationships" xmlns:p="http://schemas.openxmlformats.org/presentationml/2006/main" xmlns:m="http://schemas.openxmlformats.org/officeDocument/2006/math" xmlns:w="http://schemas.openxmlformats.org/wordprocessingml/2006/main" showMasterSp="1">
+  <p:cSld name="">
+    <p:spTree>
+      <p:nvGrpSpPr>
+        <p:cNvPr id="1" name=""/>
+        <p:cNvGrpSpPr/>
+        <p:nvPr/>
+      </p:nvGrpSpPr>
+      <p:grpSpPr bwMode="auto">
+        <a:xfrm>
+          <a:off x="0" y="0"/>
+          <a:ext cx="0" cy="0"/>
+          <a:chOff x="0" y="0"/>
+          <a:chExt cx="0" cy="0"/>
+        </a:xfrm>
+      </p:grpSpPr>
+      <p:sp>
+        <p:nvSpPr>
+          <p:cNvPr id="1038752093" name="Google Shape;3;n"/>
+          <p:cNvSpPr/>
+          <p:nvPr>
+            <p:ph type="sldImg" idx="2"/>
+          </p:nvPr>
+        </p:nvSpPr>
+        <p:spPr bwMode="auto">
+          <a:custGeom>
+            <a:avLst/>
+            <a:gdLst/>
+            <a:ahLst/>
+            <a:cxnLst/>
+            <a:rect l="l" t="t" r="r" b="b"/>
+            <a:pathLst>
+              <a:path w="120000" h="120000" fill="norm" stroke="1" extrusionOk="0">
+                <a:moveTo>
+                  <a:pt x="0" y="0"/>
+                </a:moveTo>
+                <a:lnTo>
+                  <a:pt x="120000" y="0"/>
+                </a:lnTo>
+                <a:lnTo>
+                  <a:pt x="120000" y="120000"/>
+                </a:lnTo>
+                <a:lnTo>
+                  <a:pt x="0" y="120000"/>
+                </a:lnTo>
+                <a:close/>
+              </a:path>
+            </a:pathLst>
+          </a:custGeom>
+          <a:noFill/>
+          <a:ln>
+            <a:noFill/>
+          </a:ln>
+        </p:spPr>
+      </p:sp>
+      <p:sp>
+        <p:nvSpPr>
+          <p:cNvPr id="790957929" name="Google Shape;4;n"/>
+          <p:cNvSpPr txBox="1"/>
+          <p:nvPr>
+            <p:ph type="body" idx="1"/>
+          </p:nvPr>
+        </p:nvSpPr>
+        <p:spPr bwMode="auto">
+          <a:prstGeom prst="rect">
+            <a:avLst/>
+          </a:prstGeom>
+          <a:noFill/>
+          <a:ln>
+            <a:noFill/>
+          </a:ln>
+        </p:spPr>
+        <p:txBody>
+          <a:bodyPr/>
+          <a:lstStyle/>
+          <a:p>
+            <a:pPr>
+              <a:defRPr/>
+            </a:pPr>
+            <a:endParaRPr/>
+          </a:p>
+        </p:txBody>
+      </p:sp>
+      <p:sp>
+        <p:nvSpPr>
+          <p:cNvPr id="959062511" name="Slide Number Placeholder 4"/>
           <p:cNvSpPr>
             <a:spLocks noGrp="1"/>
           </p:cNvSpPr>
@@ -1493,7 +2131,7 @@
       </p:grpSpPr>
       <p:sp>
         <p:nvSpPr>
-          <p:cNvPr id="1418919761" name="Google Shape;79;p1:notes"/>
+          <p:cNvPr id="2086402493" name="Google Shape;79;p1:notes"/>
           <p:cNvSpPr/>
           <p:nvPr>
             <p:ph type="sldImg" idx="2"/>
@@ -1536,7 +2174,7 @@
       </p:sp>
       <p:sp>
         <p:nvSpPr>
-          <p:cNvPr id="462773663" name="Google Shape;80;p1:notes"/>
+          <p:cNvPr id="994771334" name="Google Shape;80;p1:notes"/>
           <p:cNvSpPr txBox="1"/>
           <p:nvPr>
             <p:ph type="body" idx="1"/>
@@ -1556,7 +2194,7 @@
           </a:ln>
         </p:spPr>
         <p:txBody>
-          <a:bodyPr spcFirstLastPara="1" wrap="square" lIns="91424" tIns="45699" rIns="91424" bIns="45699" anchor="t" anchorCtr="0">
+          <a:bodyPr spcFirstLastPara="1" wrap="square" lIns="91423" tIns="45699" rIns="91423" bIns="45699" anchor="t" anchorCtr="0">
             <a:noAutofit/>
           </a:bodyPr>
           <a:lstStyle/>
@@ -1606,7 +2244,7 @@
       </p:grpSpPr>
       <p:sp>
         <p:nvSpPr>
-          <p:cNvPr id="1438462913" name="Google Shape;3;n"/>
+          <p:cNvPr id="854921442" name="Google Shape;3;n"/>
           <p:cNvSpPr/>
           <p:nvPr>
             <p:ph type="sldImg" idx="2"/>
@@ -1645,7 +2283,7 @@
       </p:sp>
       <p:sp>
         <p:nvSpPr>
-          <p:cNvPr id="547050918" name="Google Shape;4;n"/>
+          <p:cNvPr id="2018947927" name="Google Shape;4;n"/>
           <p:cNvSpPr txBox="1"/>
           <p:nvPr>
             <p:ph type="body" idx="1"/>
@@ -1673,7 +2311,7 @@
       </p:sp>
       <p:sp>
         <p:nvSpPr>
-          <p:cNvPr id="451040526" name="Slide Number Placeholder 4"/>
+          <p:cNvPr id="1906173912" name="Slide Number Placeholder 4"/>
           <p:cNvSpPr>
             <a:spLocks noGrp="1"/>
           </p:cNvSpPr>
@@ -1736,7 +2374,7 @@
       </p:grpSpPr>
       <p:sp>
         <p:nvSpPr>
-          <p:cNvPr id="2115813438" name="Google Shape;3;n"/>
+          <p:cNvPr id="2102398643" name="Google Shape;3;n"/>
           <p:cNvSpPr/>
           <p:nvPr>
             <p:ph type="sldImg" idx="2"/>
@@ -1775,7 +2413,7 @@
       </p:sp>
       <p:sp>
         <p:nvSpPr>
-          <p:cNvPr id="531836548" name="Google Shape;4;n"/>
+          <p:cNvPr id="198229230" name="Google Shape;4;n"/>
           <p:cNvSpPr txBox="1"/>
           <p:nvPr>
             <p:ph type="body" idx="1"/>
@@ -1803,7 +2441,7 @@
       </p:sp>
       <p:sp>
         <p:nvSpPr>
-          <p:cNvPr id="121032825" name="Slide Number Placeholder 4"/>
+          <p:cNvPr id="904705087" name="Slide Number Placeholder 4"/>
           <p:cNvSpPr>
             <a:spLocks noGrp="1"/>
           </p:cNvSpPr>
@@ -1848,6 +2486,136 @@
 </file>
 
 <file path=ppt/notesSlides/notesSlide8.xml><?xml version="1.0" encoding="utf-8"?>
+<p:notes xmlns:a="http://schemas.openxmlformats.org/drawingml/2006/main" xmlns:r="http://schemas.openxmlformats.org/officeDocument/2006/relationships" xmlns:p="http://schemas.openxmlformats.org/presentationml/2006/main" xmlns:m="http://schemas.openxmlformats.org/officeDocument/2006/math" xmlns:w="http://schemas.openxmlformats.org/wordprocessingml/2006/main" showMasterSp="1">
+  <p:cSld name="">
+    <p:spTree>
+      <p:nvGrpSpPr>
+        <p:cNvPr id="1" name=""/>
+        <p:cNvGrpSpPr/>
+        <p:nvPr/>
+      </p:nvGrpSpPr>
+      <p:grpSpPr bwMode="auto">
+        <a:xfrm>
+          <a:off x="0" y="0"/>
+          <a:ext cx="0" cy="0"/>
+          <a:chOff x="0" y="0"/>
+          <a:chExt cx="0" cy="0"/>
+        </a:xfrm>
+      </p:grpSpPr>
+      <p:sp>
+        <p:nvSpPr>
+          <p:cNvPr id="1200941538" name="Google Shape;3;n"/>
+          <p:cNvSpPr/>
+          <p:nvPr>
+            <p:ph type="sldImg" idx="2"/>
+          </p:nvPr>
+        </p:nvSpPr>
+        <p:spPr bwMode="auto">
+          <a:custGeom>
+            <a:avLst/>
+            <a:gdLst/>
+            <a:ahLst/>
+            <a:cxnLst/>
+            <a:rect l="l" t="t" r="r" b="b"/>
+            <a:pathLst>
+              <a:path w="120000" h="120000" fill="norm" stroke="1" extrusionOk="0">
+                <a:moveTo>
+                  <a:pt x="0" y="0"/>
+                </a:moveTo>
+                <a:lnTo>
+                  <a:pt x="120000" y="0"/>
+                </a:lnTo>
+                <a:lnTo>
+                  <a:pt x="120000" y="120000"/>
+                </a:lnTo>
+                <a:lnTo>
+                  <a:pt x="0" y="120000"/>
+                </a:lnTo>
+                <a:close/>
+              </a:path>
+            </a:pathLst>
+          </a:custGeom>
+          <a:noFill/>
+          <a:ln>
+            <a:noFill/>
+          </a:ln>
+        </p:spPr>
+      </p:sp>
+      <p:sp>
+        <p:nvSpPr>
+          <p:cNvPr id="2122685087" name="Google Shape;4;n"/>
+          <p:cNvSpPr txBox="1"/>
+          <p:nvPr>
+            <p:ph type="body" idx="1"/>
+          </p:nvPr>
+        </p:nvSpPr>
+        <p:spPr bwMode="auto">
+          <a:prstGeom prst="rect">
+            <a:avLst/>
+          </a:prstGeom>
+          <a:noFill/>
+          <a:ln>
+            <a:noFill/>
+          </a:ln>
+        </p:spPr>
+        <p:txBody>
+          <a:bodyPr/>
+          <a:lstStyle/>
+          <a:p>
+            <a:pPr>
+              <a:defRPr/>
+            </a:pPr>
+            <a:endParaRPr/>
+          </a:p>
+        </p:txBody>
+      </p:sp>
+      <p:sp>
+        <p:nvSpPr>
+          <p:cNvPr id="1883549368" name="Slide Number Placeholder 4"/>
+          <p:cNvSpPr>
+            <a:spLocks noGrp="1"/>
+          </p:cNvSpPr>
+          <p:nvPr>
+            <p:ph type="sldNum" sz="quarter" idx="3"/>
+          </p:nvPr>
+        </p:nvSpPr>
+        <p:spPr bwMode="auto">
+          <a:xfrm>
+            <a:off x="3886200" y="8685212"/>
+            <a:ext cx="2971800" cy="458786"/>
+          </a:xfrm>
+          <a:prstGeom prst="rect">
+            <a:avLst/>
+          </a:prstGeom>
+        </p:spPr>
+        <p:txBody>
+          <a:bodyPr vert="horz" lIns="91440" tIns="45720" rIns="91440" bIns="45720" anchor="b"/>
+          <a:lstStyle>
+            <a:lvl1pPr algn="r">
+              <a:defRPr sz="1200"/>
+            </a:lvl1pPr>
+          </a:lstStyle>
+          <a:p>
+            <a:pPr>
+              <a:defRPr/>
+            </a:pPr>
+            <a:fld id="{F3BC15D0-E648-E969-7575-0F769754D361}" type="slidenum">
+              <a:rPr/>
+              <a:t/>
+            </a:fld>
+            <a:endParaRPr/>
+          </a:p>
+        </p:txBody>
+      </p:sp>
+    </p:spTree>
+  </p:cSld>
+  <p:clrMapOvr>
+    <a:masterClrMapping/>
+  </p:clrMapOvr>
+</p:notes>
+</file>
+
+<file path=ppt/notesSlides/notesSlide9.xml><?xml version="1.0" encoding="utf-8"?>
 <p:notes xmlns:a="http://schemas.openxmlformats.org/drawingml/2006/main" xmlns:r="http://schemas.openxmlformats.org/officeDocument/2006/relationships" xmlns:p="http://schemas.openxmlformats.org/presentationml/2006/main" xmlns:m="http://schemas.openxmlformats.org/officeDocument/2006/math" xmlns:w="http://schemas.openxmlformats.org/wordprocessingml/2006/main" showMasterPhAnim="0" showMasterSp="0">
   <p:cSld name="">
     <p:spTree>
@@ -1866,7 +2634,7 @@
       </p:grpSpPr>
       <p:sp>
         <p:nvSpPr>
-          <p:cNvPr id="1459337199" name="Google Shape;79;p1:notes"/>
+          <p:cNvPr id="1282833276" name="Google Shape;79;p1:notes"/>
           <p:cNvSpPr/>
           <p:nvPr>
             <p:ph type="sldImg" idx="2"/>
@@ -1909,7 +2677,7 @@
       </p:sp>
       <p:sp>
         <p:nvSpPr>
-          <p:cNvPr id="48669531" name="Google Shape;80;p1:notes"/>
+          <p:cNvPr id="895571482" name="Google Shape;80;p1:notes"/>
           <p:cNvSpPr txBox="1"/>
           <p:nvPr>
             <p:ph type="body" idx="1"/>
@@ -1929,7 +2697,7 @@
           </a:ln>
         </p:spPr>
         <p:txBody>
-          <a:bodyPr spcFirstLastPara="1" wrap="square" lIns="91424" tIns="45699" rIns="91424" bIns="45699" anchor="t" anchorCtr="0">
+          <a:bodyPr spcFirstLastPara="1" wrap="square" lIns="91423" tIns="45699" rIns="91423" bIns="45699" anchor="t" anchorCtr="0">
             <a:noAutofit/>
           </a:bodyPr>
           <a:lstStyle/>
@@ -1948,136 +2716,6 @@
               <a:buNone/>
               <a:defRPr/>
             </a:pPr>
-            <a:endParaRPr/>
-          </a:p>
-        </p:txBody>
-      </p:sp>
-    </p:spTree>
-  </p:cSld>
-  <p:clrMapOvr>
-    <a:masterClrMapping/>
-  </p:clrMapOvr>
-</p:notes>
-</file>
-
-<file path=ppt/notesSlides/notesSlide9.xml><?xml version="1.0" encoding="utf-8"?>
-<p:notes xmlns:a="http://schemas.openxmlformats.org/drawingml/2006/main" xmlns:r="http://schemas.openxmlformats.org/officeDocument/2006/relationships" xmlns:p="http://schemas.openxmlformats.org/presentationml/2006/main" xmlns:m="http://schemas.openxmlformats.org/officeDocument/2006/math" xmlns:w="http://schemas.openxmlformats.org/wordprocessingml/2006/main" showMasterSp="1">
-  <p:cSld name="">
-    <p:spTree>
-      <p:nvGrpSpPr>
-        <p:cNvPr id="1" name=""/>
-        <p:cNvGrpSpPr/>
-        <p:nvPr/>
-      </p:nvGrpSpPr>
-      <p:grpSpPr bwMode="auto">
-        <a:xfrm>
-          <a:off x="0" y="0"/>
-          <a:ext cx="0" cy="0"/>
-          <a:chOff x="0" y="0"/>
-          <a:chExt cx="0" cy="0"/>
-        </a:xfrm>
-      </p:grpSpPr>
-      <p:sp>
-        <p:nvSpPr>
-          <p:cNvPr id="1805014459" name="Google Shape;3;n"/>
-          <p:cNvSpPr/>
-          <p:nvPr>
-            <p:ph type="sldImg" idx="2"/>
-          </p:nvPr>
-        </p:nvSpPr>
-        <p:spPr bwMode="auto">
-          <a:custGeom>
-            <a:avLst/>
-            <a:gdLst/>
-            <a:ahLst/>
-            <a:cxnLst/>
-            <a:rect l="l" t="t" r="r" b="b"/>
-            <a:pathLst>
-              <a:path w="120000" h="120000" fill="norm" stroke="1" extrusionOk="0">
-                <a:moveTo>
-                  <a:pt x="0" y="0"/>
-                </a:moveTo>
-                <a:lnTo>
-                  <a:pt x="120000" y="0"/>
-                </a:lnTo>
-                <a:lnTo>
-                  <a:pt x="120000" y="120000"/>
-                </a:lnTo>
-                <a:lnTo>
-                  <a:pt x="0" y="120000"/>
-                </a:lnTo>
-                <a:close/>
-              </a:path>
-            </a:pathLst>
-          </a:custGeom>
-          <a:noFill/>
-          <a:ln>
-            <a:noFill/>
-          </a:ln>
-        </p:spPr>
-      </p:sp>
-      <p:sp>
-        <p:nvSpPr>
-          <p:cNvPr id="702467194" name="Google Shape;4;n"/>
-          <p:cNvSpPr txBox="1"/>
-          <p:nvPr>
-            <p:ph type="body" idx="1"/>
-          </p:nvPr>
-        </p:nvSpPr>
-        <p:spPr bwMode="auto">
-          <a:prstGeom prst="rect">
-            <a:avLst/>
-          </a:prstGeom>
-          <a:noFill/>
-          <a:ln>
-            <a:noFill/>
-          </a:ln>
-        </p:spPr>
-        <p:txBody>
-          <a:bodyPr/>
-          <a:lstStyle/>
-          <a:p>
-            <a:pPr>
-              <a:defRPr/>
-            </a:pPr>
-            <a:endParaRPr/>
-          </a:p>
-        </p:txBody>
-      </p:sp>
-      <p:sp>
-        <p:nvSpPr>
-          <p:cNvPr id="1543308995" name="Slide Number Placeholder 4"/>
-          <p:cNvSpPr>
-            <a:spLocks noGrp="1"/>
-          </p:cNvSpPr>
-          <p:nvPr>
-            <p:ph type="sldNum" sz="quarter" idx="3"/>
-          </p:nvPr>
-        </p:nvSpPr>
-        <p:spPr bwMode="auto">
-          <a:xfrm>
-            <a:off x="3886200" y="8685212"/>
-            <a:ext cx="2971800" cy="458786"/>
-          </a:xfrm>
-          <a:prstGeom prst="rect">
-            <a:avLst/>
-          </a:prstGeom>
-        </p:spPr>
-        <p:txBody>
-          <a:bodyPr vert="horz" lIns="91440" tIns="45720" rIns="91440" bIns="45720" anchor="b"/>
-          <a:lstStyle>
-            <a:lvl1pPr algn="r">
-              <a:defRPr sz="1200"/>
-            </a:lvl1pPr>
-          </a:lstStyle>
-          <a:p>
-            <a:pPr>
-              <a:defRPr/>
-            </a:pPr>
-            <a:fld id="{C960D52C-4C11-5B14-7995-4AFFB546A3A3}" type="slidenum">
-              <a:rPr/>
-              <a:t/>
-            </a:fld>
             <a:endParaRPr/>
           </a:p>
         </p:txBody>
@@ -2116,7 +2754,7 @@
       </p:grpSpPr>
       <p:sp>
         <p:nvSpPr>
-          <p:cNvPr id="1155686658" name="Google Shape;10;p4"/>
+          <p:cNvPr id="830363819" name="Google Shape;10;p4"/>
           <p:cNvSpPr txBox="1"/>
           <p:nvPr>
             <p:ph type="title"/>
@@ -2376,7 +3014,7 @@
       </p:sp>
       <p:sp>
         <p:nvSpPr>
-          <p:cNvPr id="1712302227" name="Google Shape;11;p4"/>
+          <p:cNvPr id="9319690" name="Google Shape;11;p4"/>
           <p:cNvSpPr txBox="1"/>
           <p:nvPr>
             <p:ph type="sldNum" idx="12"/>
@@ -2647,7 +3285,7 @@
       </p:sp>
       <p:sp>
         <p:nvSpPr>
-          <p:cNvPr id="1125380022" name="Google Shape;12;p4"/>
+          <p:cNvPr id="1847671594" name="Google Shape;12;p4"/>
           <p:cNvSpPr/>
           <p:nvPr/>
         </p:nvSpPr>
@@ -2703,7 +3341,7 @@
       </p:sp>
       <p:pic>
         <p:nvPicPr>
-          <p:cNvPr id="1831515528" name="Google Shape;13;p4" descr="Shape 14"/>
+          <p:cNvPr id="1896073187" name="Google Shape;13;p4" descr="Shape 14"/>
           <p:cNvPicPr/>
           <p:nvPr/>
         </p:nvPicPr>
@@ -2762,7 +3400,7 @@
       </p:grpSpPr>
       <p:sp>
         <p:nvSpPr>
-          <p:cNvPr id="879859098" name="Google Shape;15;p7"/>
+          <p:cNvPr id="1882740415" name="Google Shape;15;p7"/>
           <p:cNvSpPr/>
           <p:nvPr/>
         </p:nvSpPr>
@@ -2818,7 +3456,7 @@
       </p:sp>
       <p:sp>
         <p:nvSpPr>
-          <p:cNvPr id="1308353031" name="Google Shape;16;p7"/>
+          <p:cNvPr id="1490548973" name="Google Shape;16;p7"/>
           <p:cNvSpPr/>
           <p:nvPr/>
         </p:nvSpPr>
@@ -2888,7 +3526,7 @@
       </p:sp>
       <p:sp>
         <p:nvSpPr>
-          <p:cNvPr id="350861587" name="Google Shape;17;p7"/>
+          <p:cNvPr id="397460443" name="Google Shape;17;p7"/>
           <p:cNvSpPr txBox="1"/>
           <p:nvPr>
             <p:ph type="body" idx="1"/>
@@ -2948,7 +3586,7 @@
       </p:sp>
       <p:sp>
         <p:nvSpPr>
-          <p:cNvPr id="174154565" name="Google Shape;18;p7"/>
+          <p:cNvPr id="1522830257" name="Google Shape;18;p7"/>
           <p:cNvSpPr txBox="1"/>
           <p:nvPr>
             <p:ph type="sldNum" idx="12"/>
@@ -3251,7 +3889,7 @@
       </p:grpSpPr>
       <p:sp>
         <p:nvSpPr>
-          <p:cNvPr id="2022154931" name="Google Shape;6;p3"/>
+          <p:cNvPr id="609494904" name="Google Shape;6;p3"/>
           <p:cNvSpPr txBox="1"/>
           <p:nvPr>
             <p:ph type="sldNum" idx="12"/>
@@ -3522,7 +4160,7 @@
       </p:sp>
       <p:sp>
         <p:nvSpPr>
-          <p:cNvPr id="1815708856" name="Google Shape;7;p3"/>
+          <p:cNvPr id="184072523" name="Google Shape;7;p3"/>
           <p:cNvSpPr txBox="1"/>
           <p:nvPr>
             <p:ph type="title"/>
@@ -3782,7 +4420,7 @@
       </p:sp>
       <p:sp>
         <p:nvSpPr>
-          <p:cNvPr id="601851392" name="Google Shape;8;p3"/>
+          <p:cNvPr id="2020348456" name="Google Shape;8;p3"/>
           <p:cNvSpPr txBox="1"/>
           <p:nvPr>
             <p:ph type="body" idx="1"/>
@@ -4732,7 +5370,7 @@
       </p:grpSpPr>
       <p:sp>
         <p:nvSpPr>
-          <p:cNvPr id="753916637" name="Google Shape;82;p1"/>
+          <p:cNvPr id="801068808" name="Google Shape;82;p1"/>
           <p:cNvSpPr txBox="1"/>
           <p:nvPr>
             <p:ph type="title"/>
@@ -4792,7 +5430,7 @@
       </p:sp>
       <p:sp>
         <p:nvSpPr>
-          <p:cNvPr id="603981655" name="Google Shape;83;p1"/>
+          <p:cNvPr id="1199089871" name="Google Shape;83;p1"/>
           <p:cNvSpPr txBox="1"/>
           <p:nvPr/>
         </p:nvSpPr>
@@ -4890,7 +5528,7 @@
       </p:sp>
       <p:sp>
         <p:nvSpPr>
-          <p:cNvPr id="49468758" name="Google Shape;84;p1"/>
+          <p:cNvPr id="2129473759" name="Google Shape;84;p1"/>
           <p:cNvSpPr txBox="1"/>
           <p:nvPr/>
         </p:nvSpPr>
@@ -5044,7 +5682,7 @@
       </p:sp>
       <p:sp>
         <p:nvSpPr>
-          <p:cNvPr id="1017125607" name="Google Shape;85;p1"/>
+          <p:cNvPr id="729467056" name="Google Shape;85;p1"/>
           <p:cNvSpPr txBox="1"/>
           <p:nvPr/>
         </p:nvSpPr>
@@ -5062,7 +5700,7 @@
           </a:ln>
         </p:spPr>
         <p:txBody>
-          <a:bodyPr spcFirstLastPara="1" wrap="square" lIns="91424" tIns="91424" rIns="91424" bIns="91424" anchor="t" anchorCtr="0">
+          <a:bodyPr spcFirstLastPara="1" wrap="square" lIns="91423" tIns="91423" rIns="91423" bIns="91423" anchor="t" anchorCtr="0">
             <a:noAutofit/>
           </a:bodyPr>
           <a:lstStyle/>
@@ -5191,7 +5829,7 @@
       </p:sp>
       <p:pic>
         <p:nvPicPr>
-          <p:cNvPr id="1799879974" name="Google Shape;86;p1"/>
+          <p:cNvPr id="763179063" name="Google Shape;86;p1"/>
           <p:cNvPicPr/>
           <p:nvPr/>
         </p:nvPicPr>
@@ -5218,7 +5856,7 @@
       </p:pic>
       <p:sp>
         <p:nvSpPr>
-          <p:cNvPr id="1822379727" name="Google Shape;87;p1"/>
+          <p:cNvPr id="2088632343" name="Google Shape;87;p1"/>
           <p:cNvSpPr txBox="1"/>
           <p:nvPr/>
         </p:nvSpPr>
@@ -5278,6 +5916,1768 @@
               <a:ea typeface="Inter"/>
               <a:cs typeface="Inter"/>
             </a:endParaRPr>
+          </a:p>
+        </p:txBody>
+      </p:sp>
+    </p:spTree>
+  </p:cSld>
+  <p:clrMapOvr>
+    <a:masterClrMapping/>
+  </p:clrMapOvr>
+  <mc:AlternateContent xmlns:mc="http://schemas.openxmlformats.org/markup-compatibility/2006">
+    <mc:Choice xmlns:p159="http://schemas.microsoft.com/office/powerpoint/2015/09/main" xmlns:p14="http://schemas.microsoft.com/office/powerpoint/2010/main" Requires="p159">
+      <p:transition p14:dur="500" advClick="1"/>
+    </mc:Choice>
+    <mc:Fallback>
+      <p:transition advClick="1"/>
+    </mc:Fallback>
+  </mc:AlternateContent>
+</p:sld>
+</file>
+
+<file path=ppt/slides/slide10.xml><?xml version="1.0" encoding="utf-8"?>
+<p:sld xmlns:a="http://schemas.openxmlformats.org/drawingml/2006/main" xmlns:r="http://schemas.openxmlformats.org/officeDocument/2006/relationships" xmlns:p="http://schemas.openxmlformats.org/presentationml/2006/main" xmlns:m="http://schemas.openxmlformats.org/officeDocument/2006/math" xmlns:w="http://schemas.openxmlformats.org/wordprocessingml/2006/main" xmlns:mc="http://schemas.openxmlformats.org/markup-compatibility/2006" showMasterPhAnim="0" showMasterSp="1" show="1">
+  <p:cSld name="">
+    <p:spTree>
+      <p:nvGrpSpPr>
+        <p:cNvPr id="1" name=""/>
+        <p:cNvGrpSpPr/>
+        <p:nvPr/>
+      </p:nvGrpSpPr>
+      <p:grpSpPr bwMode="auto">
+        <a:xfrm>
+          <a:off x="0" y="0"/>
+          <a:ext cx="0" cy="0"/>
+          <a:chOff x="0" y="0"/>
+          <a:chExt cx="0" cy="0"/>
+        </a:xfrm>
+      </p:grpSpPr>
+      <p:sp>
+        <p:nvSpPr>
+          <p:cNvPr id="556073456" name="Google Shape;17;p7"/>
+          <p:cNvSpPr txBox="1"/>
+          <p:nvPr>
+            <p:ph type="body" idx="1"/>
+          </p:nvPr>
+        </p:nvSpPr>
+        <p:spPr bwMode="auto">
+          <a:prstGeom prst="rect">
+            <a:avLst/>
+          </a:prstGeom>
+          <a:noFill/>
+          <a:ln>
+            <a:noFill/>
+          </a:ln>
+        </p:spPr>
+        <p:txBody>
+          <a:bodyPr/>
+          <a:lstStyle/>
+          <a:p>
+            <a:pPr>
+              <a:defRPr/>
+            </a:pPr>
+            <a:r>
+              <a:rPr lang="fr-FR"/>
+              <a:t>ICMPv6</a:t>
+            </a:r>
+            <a:endParaRPr/>
+          </a:p>
+        </p:txBody>
+      </p:sp>
+      <p:sp>
+        <p:nvSpPr>
+          <p:cNvPr id="2024576606" name="Google Shape;18;p7"/>
+          <p:cNvSpPr txBox="1"/>
+          <p:nvPr>
+            <p:ph type="sldNum" idx="12"/>
+          </p:nvPr>
+        </p:nvSpPr>
+        <p:spPr bwMode="auto">
+          <a:prstGeom prst="rect">
+            <a:avLst/>
+          </a:prstGeom>
+          <a:noFill/>
+          <a:ln>
+            <a:noFill/>
+          </a:ln>
+        </p:spPr>
+        <p:txBody>
+          <a:bodyPr/>
+          <a:lstStyle/>
+          <a:p>
+            <a:pPr marL="0" lvl="0" indent="0" algn="r" rtl="0">
+              <a:spcBef>
+                <a:spcPts val="0"/>
+              </a:spcBef>
+              <a:spcAft>
+                <a:spcPts val="0"/>
+              </a:spcAft>
+              <a:buNone/>
+              <a:defRPr/>
+            </a:pPr>
+            <a:fld id="{DBB77244-5EC1-7B83-9BBA-D3F58816C736}" type="slidenum">
+              <a:rPr lang="en-US"/>
+              <a:t>7</a:t>
+            </a:fld>
+            <a:endParaRPr/>
+          </a:p>
+        </p:txBody>
+      </p:sp>
+      <p:sp>
+        <p:nvSpPr>
+          <p:cNvPr id="513566270" name="Rectangle 3"/>
+          <p:cNvSpPr txBox="1"/>
+          <p:nvPr/>
+        </p:nvSpPr>
+        <p:spPr bwMode="auto">
+          <a:xfrm rot="0" flipH="0" flipV="0">
+            <a:off x="154797" y="350183"/>
+            <a:ext cx="7091862" cy="3505559"/>
+          </a:xfrm>
+          <a:prstGeom prst="rect">
+            <a:avLst/>
+          </a:prstGeom>
+          <a:noFill/>
+        </p:spPr>
+        <p:txBody>
+          <a:bodyPr vertOverflow="overflow" horzOverflow="overflow" vert="horz" wrap="none" lIns="91440" tIns="45720" rIns="91440" bIns="45720" numCol="1" spcCol="0" rtlCol="0" fromWordArt="0" anchor="t" anchorCtr="0" forceAA="0" upright="0" compatLnSpc="0">
+            <a:spAutoFit/>
+          </a:bodyPr>
+          <a:p>
+            <a:pPr marL="239821" marR="0" indent="-239821" algn="l">
+              <a:lnSpc>
+                <a:spcPct val="100000"/>
+              </a:lnSpc>
+              <a:spcBef>
+                <a:spcPts val="0"/>
+              </a:spcBef>
+              <a:spcAft>
+                <a:spcPts val="0"/>
+              </a:spcAft>
+              <a:buFont typeface="Arial"/>
+              <a:buChar char="•"/>
+              <a:defRPr/>
+            </a:pPr>
+            <a:r>
+              <a:rPr lang="fr-FR" sz="1600" b="1" i="0" u="none" strike="noStrike" cap="none" spc="0">
+                <a:solidFill>
+                  <a:srgbClr val="000000"/>
+                </a:solidFill>
+                <a:latin typeface="Arial"/>
+                <a:ea typeface="Arial"/>
+                <a:cs typeface="Arial"/>
+              </a:rPr>
+              <a:t>new Field IDs for the ICMPv6 header</a:t>
+            </a:r>
+            <a:r>
+              <a:rPr lang="fr-FR" sz="1600" b="0" i="0" u="none" strike="noStrike" cap="none" spc="0">
+                <a:solidFill>
+                  <a:srgbClr val="000000"/>
+                </a:solidFill>
+                <a:latin typeface="Arial"/>
+                <a:ea typeface="Arial"/>
+                <a:cs typeface="Arial"/>
+              </a:rPr>
+              <a:t> :</a:t>
+            </a:r>
+            <a:endParaRPr sz="1600" b="0" i="0" u="none" strike="noStrike" cap="none" spc="0">
+              <a:solidFill>
+                <a:srgbClr val="000000"/>
+              </a:solidFill>
+              <a:latin typeface="Arial"/>
+              <a:ea typeface="Arial"/>
+              <a:cs typeface="Arial"/>
+            </a:endParaRPr>
+          </a:p>
+          <a:p>
+            <a:pPr marL="639871" marR="0" lvl="1" indent="-239821" algn="l">
+              <a:lnSpc>
+                <a:spcPct val="100000"/>
+              </a:lnSpc>
+              <a:spcBef>
+                <a:spcPts val="0"/>
+              </a:spcBef>
+              <a:spcAft>
+                <a:spcPts val="0"/>
+              </a:spcAft>
+              <a:buFont typeface="Arial"/>
+              <a:buChar char="•"/>
+              <a:defRPr/>
+            </a:pPr>
+            <a:r>
+              <a:rPr lang="fr-FR" sz="1600" b="0" i="0" u="none" strike="noStrike" cap="none" spc="0">
+                <a:solidFill>
+                  <a:srgbClr val="000000"/>
+                </a:solidFill>
+                <a:latin typeface="Arial"/>
+                <a:ea typeface="Arial"/>
+                <a:cs typeface="Arial"/>
+              </a:rPr>
+              <a:t>Dedicated : type, code, checksum, MTU, pointer, identifier, sequence, </a:t>
+            </a:r>
+            <a:endParaRPr sz="1600" b="0" i="0" u="none" strike="noStrike" cap="none" spc="0">
+              <a:solidFill>
+                <a:srgbClr val="000000"/>
+              </a:solidFill>
+              <a:latin typeface="Arial"/>
+              <a:ea typeface="Arial"/>
+              <a:cs typeface="Arial"/>
+            </a:endParaRPr>
+          </a:p>
+          <a:p>
+            <a:pPr marL="639871" marR="0" lvl="1" indent="-239821" algn="l">
+              <a:lnSpc>
+                <a:spcPct val="100000"/>
+              </a:lnSpc>
+              <a:spcBef>
+                <a:spcPts val="0"/>
+              </a:spcBef>
+              <a:spcAft>
+                <a:spcPts val="0"/>
+              </a:spcAft>
+              <a:buFont typeface="Arial"/>
+              <a:buChar char="•"/>
+              <a:defRPr/>
+            </a:pPr>
+            <a:r>
+              <a:rPr lang="fr-FR" sz="1600" b="0" i="0" u="none" strike="noStrike" cap="none" spc="0">
+                <a:solidFill>
+                  <a:srgbClr val="000000"/>
+                </a:solidFill>
+                <a:latin typeface="Arial"/>
+                <a:ea typeface="Arial"/>
+                <a:cs typeface="Arial"/>
+              </a:rPr>
+              <a:t>Generic : unused, payload</a:t>
+            </a:r>
+            <a:endParaRPr sz="1600"/>
+          </a:p>
+          <a:p>
+            <a:pPr marL="239821" marR="0" lvl="0" indent="-239821" algn="l">
+              <a:lnSpc>
+                <a:spcPct val="100000"/>
+              </a:lnSpc>
+              <a:spcBef>
+                <a:spcPts val="0"/>
+              </a:spcBef>
+              <a:spcAft>
+                <a:spcPts val="0"/>
+              </a:spcAft>
+              <a:buFont typeface="Arial"/>
+              <a:buChar char="•"/>
+              <a:defRPr/>
+            </a:pPr>
+            <a:r>
+              <a:rPr lang="fr-FR" sz="1600" b="0" i="0" u="none" strike="noStrike" cap="none" spc="0">
+                <a:solidFill>
+                  <a:srgbClr val="000000"/>
+                </a:solidFill>
+                <a:latin typeface="Arial"/>
+                <a:ea typeface="Arial"/>
+                <a:cs typeface="Arial"/>
+              </a:rPr>
+              <a:t>Device receives an error</a:t>
+            </a:r>
+            <a:r>
+              <a:rPr lang="fr-FR" sz="1600"/>
+              <a:t> :</a:t>
+            </a:r>
+            <a:endParaRPr sz="1600" b="0" i="0" u="none" strike="noStrike" cap="none" spc="0">
+              <a:solidFill>
+                <a:srgbClr val="000000"/>
+              </a:solidFill>
+              <a:latin typeface="Arial"/>
+              <a:ea typeface="Arial"/>
+              <a:cs typeface="Arial"/>
+            </a:endParaRPr>
+          </a:p>
+          <a:p>
+            <a:pPr marL="639871" marR="0" lvl="1" indent="-239821" algn="l">
+              <a:lnSpc>
+                <a:spcPct val="100000"/>
+              </a:lnSpc>
+              <a:spcBef>
+                <a:spcPts val="0"/>
+              </a:spcBef>
+              <a:spcAft>
+                <a:spcPts val="0"/>
+              </a:spcAft>
+              <a:buFont typeface="Arial"/>
+              <a:buChar char="•"/>
+              <a:defRPr/>
+            </a:pPr>
+            <a:r>
+              <a:rPr lang="fr-FR" sz="1600" b="1" i="0" u="none" strike="noStrike" cap="none" spc="0">
+                <a:solidFill>
+                  <a:srgbClr val="000000"/>
+                </a:solidFill>
+                <a:latin typeface="Arial"/>
+                <a:ea typeface="Arial"/>
+                <a:cs typeface="Arial"/>
+              </a:rPr>
+              <a:t>compress the embedded invoking packet :</a:t>
+            </a:r>
+            <a:endParaRPr sz="1600" b="1" i="0" u="none" strike="noStrike" cap="none" spc="0">
+              <a:solidFill>
+                <a:srgbClr val="000000"/>
+              </a:solidFill>
+              <a:latin typeface="Arial"/>
+              <a:ea typeface="Arial"/>
+              <a:cs typeface="Arial"/>
+            </a:endParaRPr>
+          </a:p>
+          <a:p>
+            <a:pPr marL="1039921" marR="0" lvl="2" indent="-239821" algn="l">
+              <a:lnSpc>
+                <a:spcPct val="100000"/>
+              </a:lnSpc>
+              <a:spcBef>
+                <a:spcPts val="0"/>
+              </a:spcBef>
+              <a:spcAft>
+                <a:spcPts val="0"/>
+              </a:spcAft>
+              <a:buFont typeface="Arial"/>
+              <a:buChar char="•"/>
+              <a:defRPr/>
+            </a:pPr>
+            <a:r>
+              <a:rPr lang="fr-FR" sz="1600" b="0" i="0" u="none" strike="noStrike" cap="none" spc="0">
+                <a:solidFill>
+                  <a:srgbClr val="000000"/>
+                </a:solidFill>
+                <a:latin typeface="Arial"/>
+                <a:ea typeface="Arial"/>
+                <a:cs typeface="Arial"/>
+              </a:rPr>
+              <a:t>Inside the Rule, </a:t>
+            </a:r>
+            <a:endParaRPr sz="1600" b="0" i="0" u="none" strike="noStrike" cap="none" spc="0">
+              <a:solidFill>
+                <a:srgbClr val="000000"/>
+              </a:solidFill>
+              <a:latin typeface="Arial"/>
+              <a:ea typeface="Arial"/>
+              <a:cs typeface="Arial"/>
+            </a:endParaRPr>
+          </a:p>
+          <a:p>
+            <a:pPr marL="1039921" marR="0" lvl="2" indent="-239821" algn="l">
+              <a:lnSpc>
+                <a:spcPct val="100000"/>
+              </a:lnSpc>
+              <a:spcBef>
+                <a:spcPts val="0"/>
+              </a:spcBef>
+              <a:spcAft>
+                <a:spcPts val="0"/>
+              </a:spcAft>
+              <a:buFont typeface="Arial"/>
+              <a:buChar char="•"/>
+              <a:defRPr/>
+            </a:pPr>
+            <a:r>
+              <a:rPr lang="fr-FR" sz="1600" b="0" i="0" u="none" strike="noStrike" cap="none" spc="0">
+                <a:solidFill>
+                  <a:srgbClr val="000000"/>
+                </a:solidFill>
+                <a:latin typeface="Arial"/>
+                <a:ea typeface="Arial"/>
+                <a:cs typeface="Arial"/>
+              </a:rPr>
+              <a:t>using new MOs and CDAs :</a:t>
+            </a:r>
+            <a:endParaRPr sz="1600" b="0" i="0" u="none" strike="noStrike" cap="none" spc="0">
+              <a:solidFill>
+                <a:srgbClr val="000000"/>
+              </a:solidFill>
+              <a:latin typeface="Arial"/>
+              <a:ea typeface="Arial"/>
+              <a:cs typeface="Arial"/>
+            </a:endParaRPr>
+          </a:p>
+          <a:p>
+            <a:pPr marL="1439971" marR="0" lvl="3" indent="-239821" algn="l">
+              <a:lnSpc>
+                <a:spcPct val="100000"/>
+              </a:lnSpc>
+              <a:spcBef>
+                <a:spcPts val="0"/>
+              </a:spcBef>
+              <a:spcAft>
+                <a:spcPts val="0"/>
+              </a:spcAft>
+              <a:buFont typeface="Arial"/>
+              <a:buChar char="•"/>
+              <a:defRPr/>
+            </a:pPr>
+            <a:r>
+              <a:rPr lang="fr-FR" sz="1600" b="0" i="0" u="none" strike="noStrike" cap="none" spc="0">
+                <a:solidFill>
+                  <a:srgbClr val="000000"/>
+                </a:solidFill>
+                <a:latin typeface="Arial"/>
+                <a:ea typeface="Arial"/>
+                <a:cs typeface="Arial"/>
+              </a:rPr>
+              <a:t>rule-match, rev-rule-match, </a:t>
+            </a:r>
+            <a:endParaRPr sz="1600" b="0" i="0" u="none" strike="noStrike" cap="none" spc="0">
+              <a:solidFill>
+                <a:srgbClr val="000000"/>
+              </a:solidFill>
+              <a:latin typeface="Arial"/>
+              <a:ea typeface="Arial"/>
+              <a:cs typeface="Arial"/>
+            </a:endParaRPr>
+          </a:p>
+          <a:p>
+            <a:pPr marL="1439971" marR="0" lvl="3" indent="-239821" algn="l">
+              <a:lnSpc>
+                <a:spcPct val="100000"/>
+              </a:lnSpc>
+              <a:spcBef>
+                <a:spcPts val="0"/>
+              </a:spcBef>
+              <a:spcAft>
+                <a:spcPts val="0"/>
+              </a:spcAft>
+              <a:buFont typeface="Arial"/>
+              <a:buChar char="•"/>
+              <a:defRPr/>
+            </a:pPr>
+            <a:r>
+              <a:rPr lang="fr-FR" sz="1600" b="0" i="0" u="none" strike="noStrike" cap="none" spc="0">
+                <a:solidFill>
+                  <a:srgbClr val="000000"/>
+                </a:solidFill>
+                <a:latin typeface="Arial"/>
+                <a:ea typeface="Arial"/>
+                <a:cs typeface="Arial"/>
+              </a:rPr>
+              <a:t>compress-sent, rev-compress-sent</a:t>
+            </a:r>
+            <a:endParaRPr sz="1600"/>
+          </a:p>
+          <a:p>
+            <a:pPr marL="239821" marR="0" lvl="0" indent="-239821" algn="l">
+              <a:lnSpc>
+                <a:spcPct val="100000"/>
+              </a:lnSpc>
+              <a:spcBef>
+                <a:spcPts val="0"/>
+              </a:spcBef>
+              <a:spcAft>
+                <a:spcPts val="0"/>
+              </a:spcAft>
+              <a:buFont typeface="Arial"/>
+              <a:buChar char="•"/>
+              <a:defRPr/>
+            </a:pPr>
+            <a:r>
+              <a:rPr lang="fr-FR" sz="1600" b="0" i="0" u="none" strike="noStrike" cap="none" spc="0">
+                <a:solidFill>
+                  <a:srgbClr val="000000"/>
+                </a:solidFill>
+                <a:latin typeface="Arial"/>
+                <a:ea typeface="Arial"/>
+                <a:cs typeface="Arial"/>
+              </a:rPr>
+              <a:t>Device should send an error:</a:t>
+            </a:r>
+            <a:endParaRPr sz="1600"/>
+          </a:p>
+          <a:p>
+            <a:pPr marL="639871" marR="0" lvl="1" indent="-239821" algn="l">
+              <a:lnSpc>
+                <a:spcPct val="100000"/>
+              </a:lnSpc>
+              <a:spcBef>
+                <a:spcPts val="0"/>
+              </a:spcBef>
+              <a:spcAft>
+                <a:spcPts val="0"/>
+              </a:spcAft>
+              <a:buFont typeface="Arial"/>
+              <a:buChar char="•"/>
+              <a:defRPr/>
+            </a:pPr>
+            <a:r>
+              <a:rPr lang="fr-FR" sz="1600" b="0" i="0" u="none" strike="noStrike" cap="none" spc="0">
+                <a:solidFill>
+                  <a:srgbClr val="000000"/>
+                </a:solidFill>
+                <a:latin typeface="Arial"/>
+                <a:ea typeface="Arial"/>
+                <a:cs typeface="Arial"/>
+              </a:rPr>
+              <a:t>the SCHC Core generates the ICMPv6 error (e.g., Port Unreachable)</a:t>
+            </a:r>
+            <a:endParaRPr sz="1600" b="0" i="0" u="none" strike="noStrike" cap="none" spc="0">
+              <a:solidFill>
+                <a:srgbClr val="000000"/>
+              </a:solidFill>
+              <a:latin typeface="Arial"/>
+              <a:ea typeface="Arial"/>
+              <a:cs typeface="Arial"/>
+            </a:endParaRPr>
+          </a:p>
+          <a:p>
+            <a:pPr marL="239821" indent="-239821" algn="l">
+              <a:lnSpc>
+                <a:spcPct val="100000"/>
+              </a:lnSpc>
+              <a:spcBef>
+                <a:spcPts val="0"/>
+              </a:spcBef>
+              <a:spcAft>
+                <a:spcPts val="0"/>
+              </a:spcAft>
+              <a:buFont typeface="Arial"/>
+              <a:buChar char="•"/>
+              <a:defRPr/>
+            </a:pPr>
+            <a:r>
+              <a:rPr lang="fr-FR" sz="1600" b="1" i="0" u="none" strike="noStrike" cap="none" spc="0">
+                <a:solidFill>
+                  <a:srgbClr val="000000"/>
+                </a:solidFill>
+                <a:latin typeface="Arial"/>
+                <a:ea typeface="Arial"/>
+                <a:cs typeface="Arial"/>
+              </a:rPr>
+              <a:t>Action </a:t>
+            </a:r>
+            <a:r>
+              <a:rPr lang="fr-FR" sz="1600" b="0" i="0" u="none" strike="noStrike" cap="none" spc="0">
+                <a:solidFill>
+                  <a:srgbClr val="000000"/>
+                </a:solidFill>
+                <a:latin typeface="Arial"/>
+                <a:ea typeface="Arial"/>
+                <a:cs typeface="Arial"/>
+              </a:rPr>
+              <a:t>(generic): go to a procedure instead of being compressed :</a:t>
+            </a:r>
+            <a:endParaRPr sz="1600" b="0" i="0" u="none" strike="noStrike" cap="none" spc="0">
+              <a:solidFill>
+                <a:srgbClr val="000000"/>
+              </a:solidFill>
+              <a:latin typeface="Arial"/>
+              <a:ea typeface="Arial"/>
+              <a:cs typeface="Arial"/>
+            </a:endParaRPr>
+          </a:p>
+          <a:p>
+            <a:pPr marL="639871" lvl="1" indent="-239821" algn="l">
+              <a:lnSpc>
+                <a:spcPct val="100000"/>
+              </a:lnSpc>
+              <a:spcBef>
+                <a:spcPts val="0"/>
+              </a:spcBef>
+              <a:spcAft>
+                <a:spcPts val="0"/>
+              </a:spcAft>
+              <a:buFont typeface="Arial"/>
+              <a:buChar char="•"/>
+              <a:defRPr/>
+            </a:pPr>
+            <a:r>
+              <a:rPr lang="fr-FR" sz="1600" b="0" i="0" u="none" strike="noStrike" cap="none" spc="0">
+                <a:solidFill>
+                  <a:srgbClr val="000000"/>
+                </a:solidFill>
+                <a:latin typeface="Arial"/>
+                <a:ea typeface="Arial"/>
+                <a:cs typeface="Arial"/>
+              </a:rPr>
+              <a:t>action-forward by default</a:t>
+            </a:r>
+            <a:endParaRPr sz="1600" b="0" i="0" u="none" strike="noStrike" cap="none" spc="0">
+              <a:solidFill>
+                <a:srgbClr val="000000"/>
+              </a:solidFill>
+              <a:latin typeface="Arial"/>
+              <a:ea typeface="Arial"/>
+              <a:cs typeface="Arial"/>
+            </a:endParaRPr>
+          </a:p>
+          <a:p>
+            <a:pPr marL="639871" lvl="1" indent="-239821" algn="l">
+              <a:lnSpc>
+                <a:spcPct val="100000"/>
+              </a:lnSpc>
+              <a:spcBef>
+                <a:spcPts val="0"/>
+              </a:spcBef>
+              <a:spcAft>
+                <a:spcPts val="0"/>
+              </a:spcAft>
+              <a:buFont typeface="Arial"/>
+              <a:buChar char="•"/>
+              <a:defRPr/>
+            </a:pPr>
+            <a:r>
+              <a:rPr lang="fr-FR" sz="1600" b="0" i="0" u="none" strike="noStrike" cap="none" spc="0">
+                <a:solidFill>
+                  <a:srgbClr val="000000"/>
+                </a:solidFill>
+                <a:latin typeface="Arial"/>
+                <a:ea typeface="Arial"/>
+                <a:cs typeface="Arial"/>
+              </a:rPr>
+              <a:t>action-proxy-ping for echo requests</a:t>
+            </a:r>
+            <a:endParaRPr sz="1600" b="0" i="0" u="none" strike="noStrike" cap="none" spc="0">
+              <a:solidFill>
+                <a:srgbClr val="000000"/>
+              </a:solidFill>
+              <a:latin typeface="Arial"/>
+              <a:cs typeface="Arial"/>
+            </a:endParaRPr>
+          </a:p>
+        </p:txBody>
+      </p:sp>
+    </p:spTree>
+  </p:cSld>
+  <p:clrMapOvr>
+    <a:masterClrMapping/>
+  </p:clrMapOvr>
+  <mc:AlternateContent xmlns:mc="http://schemas.openxmlformats.org/markup-compatibility/2006">
+    <mc:Choice xmlns:p159="http://schemas.microsoft.com/office/powerpoint/2015/09/main" xmlns:p14="http://schemas.microsoft.com/office/powerpoint/2010/main" Requires="p159">
+      <p:transition p14:dur="500" advClick="1"/>
+    </mc:Choice>
+    <mc:Fallback>
+      <p:transition advClick="1"/>
+    </mc:Fallback>
+  </mc:AlternateContent>
+</p:sld>
+</file>
+
+<file path=ppt/slides/slide11.xml><?xml version="1.0" encoding="utf-8"?>
+<p:sld xmlns:a="http://schemas.openxmlformats.org/drawingml/2006/main" xmlns:r="http://schemas.openxmlformats.org/officeDocument/2006/relationships" xmlns:p="http://schemas.openxmlformats.org/presentationml/2006/main" xmlns:m="http://schemas.openxmlformats.org/officeDocument/2006/math" xmlns:w="http://schemas.openxmlformats.org/wordprocessingml/2006/main" xmlns:mc="http://schemas.openxmlformats.org/markup-compatibility/2006" showMasterPhAnim="0" showMasterSp="1" show="1">
+  <p:cSld name="">
+    <p:spTree>
+      <p:nvGrpSpPr>
+        <p:cNvPr id="1" name=""/>
+        <p:cNvGrpSpPr/>
+        <p:nvPr/>
+      </p:nvGrpSpPr>
+      <p:grpSpPr bwMode="auto">
+        <a:xfrm>
+          <a:off x="0" y="0"/>
+          <a:ext cx="0" cy="0"/>
+          <a:chOff x="0" y="0"/>
+          <a:chExt cx="0" cy="0"/>
+        </a:xfrm>
+      </p:grpSpPr>
+      <p:sp>
+        <p:nvSpPr>
+          <p:cNvPr id="967324521" name="Google Shape;17;p7"/>
+          <p:cNvSpPr txBox="1"/>
+          <p:nvPr>
+            <p:ph type="body" idx="1"/>
+          </p:nvPr>
+        </p:nvSpPr>
+        <p:spPr bwMode="auto">
+          <a:prstGeom prst="rect">
+            <a:avLst/>
+          </a:prstGeom>
+          <a:noFill/>
+          <a:ln>
+            <a:noFill/>
+          </a:ln>
+        </p:spPr>
+        <p:txBody>
+          <a:bodyPr/>
+          <a:lstStyle/>
+          <a:p>
+            <a:pPr>
+              <a:defRPr/>
+            </a:pPr>
+            <a:r>
+              <a:rPr lang="fr-FR"/>
+              <a:t>Reverse compression</a:t>
+            </a:r>
+            <a:endParaRPr/>
+          </a:p>
+        </p:txBody>
+      </p:sp>
+      <p:sp>
+        <p:nvSpPr>
+          <p:cNvPr id="2281940" name="Google Shape;18;p7"/>
+          <p:cNvSpPr txBox="1"/>
+          <p:nvPr>
+            <p:ph type="sldNum" idx="12"/>
+          </p:nvPr>
+        </p:nvSpPr>
+        <p:spPr bwMode="auto">
+          <a:prstGeom prst="rect">
+            <a:avLst/>
+          </a:prstGeom>
+          <a:noFill/>
+          <a:ln>
+            <a:noFill/>
+          </a:ln>
+        </p:spPr>
+        <p:txBody>
+          <a:bodyPr/>
+          <a:lstStyle/>
+          <a:p>
+            <a:pPr marL="0" lvl="0" indent="0" algn="r" rtl="0">
+              <a:spcBef>
+                <a:spcPts val="0"/>
+              </a:spcBef>
+              <a:spcAft>
+                <a:spcPts val="0"/>
+              </a:spcAft>
+              <a:buNone/>
+              <a:defRPr/>
+            </a:pPr>
+            <a:fld id="{AD397E46-DE6C-490C-FC1D-99FE1675A489}" type="slidenum">
+              <a:rPr lang="en-US"/>
+              <a:t>10</a:t>
+            </a:fld>
+            <a:endParaRPr/>
+          </a:p>
+        </p:txBody>
+      </p:sp>
+      <p:pic>
+        <p:nvPicPr>
+          <p:cNvPr id="1894598122" name="Google Shape;181;p10" descr="Capture d’écran 2026-09-28 à 10.46.51.png"/>
+          <p:cNvPicPr/>
+          <p:nvPr/>
+        </p:nvPicPr>
+        <p:blipFill rotWithShape="1">
+          <a:blip r:embed="rId3">
+            <a:alphaModFix/>
+          </a:blip>
+          <a:srcRect l="0" t="0" r="0" b="0"/>
+          <a:stretch/>
+        </p:blipFill>
+        <p:spPr bwMode="auto">
+          <a:xfrm flipH="0" flipV="0">
+            <a:off x="57150" y="32375"/>
+            <a:ext cx="3858876" cy="4597429"/>
+          </a:xfrm>
+          <a:prstGeom prst="rect">
+            <a:avLst/>
+          </a:prstGeom>
+          <a:noFill/>
+          <a:ln>
+            <a:noFill/>
+          </a:ln>
+        </p:spPr>
+      </p:pic>
+      <p:grpSp>
+        <p:nvGrpSpPr>
+          <p:cNvPr id="1891234937" name="Google Shape;182;p10"/>
+          <p:cNvGrpSpPr/>
+          <p:nvPr/>
+        </p:nvGrpSpPr>
+        <p:grpSpPr bwMode="auto">
+          <a:xfrm flipH="0" flipV="0">
+            <a:off x="5902713" y="115965"/>
+            <a:ext cx="2368392" cy="4584276"/>
+            <a:chOff x="0" y="0"/>
+            <a:chExt cx="2368392" cy="4584276"/>
+          </a:xfrm>
+        </p:grpSpPr>
+        <p:pic>
+          <p:nvPicPr>
+            <p:cNvPr id="400764778" name="Google Shape;183;p10" descr="Capture d’écran 2026-09-28 à 10.48.13.png"/>
+            <p:cNvPicPr/>
+            <p:nvPr/>
+          </p:nvPicPr>
+          <p:blipFill rotWithShape="1">
+            <a:blip r:embed="rId4">
+              <a:alphaModFix/>
+            </a:blip>
+            <a:srcRect l="0" t="0" r="0" b="0"/>
+            <a:stretch/>
+          </p:blipFill>
+          <p:spPr bwMode="auto">
+            <a:xfrm>
+              <a:off x="16182" y="0"/>
+              <a:ext cx="2296498" cy="717466"/>
+            </a:xfrm>
+            <a:prstGeom prst="rect">
+              <a:avLst/>
+            </a:prstGeom>
+            <a:noFill/>
+            <a:ln>
+              <a:noFill/>
+            </a:ln>
+          </p:spPr>
+        </p:pic>
+        <p:pic>
+          <p:nvPicPr>
+            <p:cNvPr id="1406077129" name="Google Shape;184;p10" descr="Capture d’écran 2026-09-28 à 10.49.22.png"/>
+            <p:cNvPicPr/>
+            <p:nvPr/>
+          </p:nvPicPr>
+          <p:blipFill rotWithShape="1">
+            <a:blip r:embed="rId5">
+              <a:alphaModFix/>
+            </a:blip>
+            <a:srcRect l="0" t="0" r="0" b="0"/>
+            <a:stretch/>
+          </p:blipFill>
+          <p:spPr bwMode="auto">
+            <a:xfrm>
+              <a:off x="15931" y="665510"/>
+              <a:ext cx="2352461" cy="3501516"/>
+            </a:xfrm>
+            <a:prstGeom prst="rect">
+              <a:avLst/>
+            </a:prstGeom>
+            <a:noFill/>
+            <a:ln>
+              <a:noFill/>
+            </a:ln>
+          </p:spPr>
+        </p:pic>
+        <p:pic>
+          <p:nvPicPr>
+            <p:cNvPr id="1133145023" name="Google Shape;185;p10" descr="Capture d’écran 2026-09-28 à 10.50.16.png"/>
+            <p:cNvPicPr/>
+            <p:nvPr/>
+          </p:nvPicPr>
+          <p:blipFill rotWithShape="1">
+            <a:blip r:embed="rId6">
+              <a:alphaModFix/>
+            </a:blip>
+            <a:srcRect l="0" t="0" r="0" b="0"/>
+            <a:stretch/>
+          </p:blipFill>
+          <p:spPr bwMode="auto">
+            <a:xfrm>
+              <a:off x="0" y="4173095"/>
+              <a:ext cx="2296498" cy="411180"/>
+            </a:xfrm>
+            <a:prstGeom prst="rect">
+              <a:avLst/>
+            </a:prstGeom>
+            <a:noFill/>
+            <a:ln>
+              <a:noFill/>
+            </a:ln>
+          </p:spPr>
+        </p:pic>
+      </p:grpSp>
+      <p:sp>
+        <p:nvSpPr>
+          <p:cNvPr id="1287122049" name="Rectangle 8"/>
+          <p:cNvSpPr txBox="1"/>
+          <p:nvPr/>
+        </p:nvSpPr>
+        <p:spPr bwMode="auto">
+          <a:xfrm rot="0" flipH="0" flipV="0">
+            <a:off x="4572000" y="1885545"/>
+            <a:ext cx="590197" cy="823320"/>
+          </a:xfrm>
+          <a:prstGeom prst="rect">
+            <a:avLst/>
+          </a:prstGeom>
+          <a:noFill/>
+        </p:spPr>
+        <p:txBody>
+          <a:bodyPr vertOverflow="overflow" horzOverflow="overflow" vert="horz" wrap="none" lIns="91440" tIns="45720" rIns="91440" bIns="45720" numCol="1" spcCol="0" rtlCol="0" fromWordArt="0" anchor="t" anchorCtr="0" forceAA="0" upright="0" compatLnSpc="0">
+            <a:spAutoFit/>
+          </a:bodyPr>
+          <a:p>
+            <a:pPr>
+              <a:defRPr/>
+            </a:pPr>
+            <a:r>
+              <a:rPr lang="fr-FR" sz="4800"/>
+              <a:t>&amp;</a:t>
+            </a:r>
+            <a:endParaRPr sz="4800"/>
+          </a:p>
+        </p:txBody>
+      </p:sp>
+      <p:pic>
+        <p:nvPicPr>
+          <p:cNvPr id="117691420" name="Google Shape;188;p10" descr="image-removebg-preview (6).png"/>
+          <p:cNvPicPr/>
+          <p:nvPr/>
+        </p:nvPicPr>
+        <p:blipFill rotWithShape="1">
+          <a:blip r:embed="rId7">
+            <a:alphaModFix/>
+          </a:blip>
+          <a:srcRect l="0" t="0" r="0" b="0"/>
+          <a:stretch/>
+        </p:blipFill>
+        <p:spPr bwMode="auto">
+          <a:xfrm rot="5400000" flipH="0" flipV="0">
+            <a:off x="7950685" y="2220401"/>
+            <a:ext cx="631964" cy="344963"/>
+          </a:xfrm>
+          <a:prstGeom prst="rect">
+            <a:avLst/>
+          </a:prstGeom>
+          <a:noFill/>
+          <a:ln>
+            <a:noFill/>
+          </a:ln>
+        </p:spPr>
+      </p:pic>
+      <p:sp>
+        <p:nvSpPr>
+          <p:cNvPr id="799675092" name="Rectangle 10"/>
+          <p:cNvSpPr txBox="1"/>
+          <p:nvPr/>
+        </p:nvSpPr>
+        <p:spPr bwMode="auto">
+          <a:xfrm rot="0" flipH="0" flipV="0">
+            <a:off x="8271106" y="1729908"/>
+            <a:ext cx="855637" cy="518519"/>
+          </a:xfrm>
+          <a:prstGeom prst="rect">
+            <a:avLst/>
+          </a:prstGeom>
+          <a:noFill/>
+        </p:spPr>
+        <p:txBody>
+          <a:bodyPr vertOverflow="overflow" horzOverflow="overflow" vert="horz" wrap="none" lIns="91440" tIns="45720" rIns="91440" bIns="45720" numCol="1" spcCol="0" rtlCol="0" fromWordArt="0" anchor="t" anchorCtr="0" forceAA="0" upright="0" compatLnSpc="0">
+            <a:spAutoFit/>
+          </a:bodyPr>
+          <a:p>
+            <a:pPr>
+              <a:defRPr/>
+            </a:pPr>
+            <a:r>
+              <a:rPr lang="fr-FR"/>
+              <a:t>Reverse </a:t>
+            </a:r>
+            <a:endParaRPr lang="fr-FR"/>
+          </a:p>
+          <a:p>
+            <a:pPr>
+              <a:defRPr/>
+            </a:pPr>
+            <a:r>
+              <a:rPr lang="fr-FR"/>
+              <a:t>direction</a:t>
+            </a:r>
+            <a:endParaRPr/>
+          </a:p>
+        </p:txBody>
+      </p:sp>
+    </p:spTree>
+  </p:cSld>
+  <p:clrMapOvr>
+    <a:masterClrMapping/>
+  </p:clrMapOvr>
+  <mc:AlternateContent xmlns:mc="http://schemas.openxmlformats.org/markup-compatibility/2006">
+    <mc:Choice xmlns:p159="http://schemas.microsoft.com/office/powerpoint/2015/09/main" xmlns:p14="http://schemas.microsoft.com/office/powerpoint/2010/main" Requires="p159">
+      <p:transition p14:dur="500" advClick="1"/>
+    </mc:Choice>
+    <mc:Fallback>
+      <p:transition advClick="1"/>
+    </mc:Fallback>
+  </mc:AlternateContent>
+</p:sld>
+</file>
+
+<file path=ppt/slides/slide12.xml><?xml version="1.0" encoding="utf-8"?>
+<p:sld xmlns:a="http://schemas.openxmlformats.org/drawingml/2006/main" xmlns:r="http://schemas.openxmlformats.org/officeDocument/2006/relationships" xmlns:p="http://schemas.openxmlformats.org/presentationml/2006/main" xmlns:m="http://schemas.openxmlformats.org/officeDocument/2006/math" xmlns:w="http://schemas.openxmlformats.org/wordprocessingml/2006/main" xmlns:mc="http://schemas.openxmlformats.org/markup-compatibility/2006" showMasterPhAnim="0" showMasterSp="1" show="1">
+  <p:cSld name="">
+    <p:spTree>
+      <p:nvGrpSpPr>
+        <p:cNvPr id="1" name=""/>
+        <p:cNvGrpSpPr/>
+        <p:nvPr/>
+      </p:nvGrpSpPr>
+      <p:grpSpPr bwMode="auto">
+        <a:xfrm>
+          <a:off x="0" y="0"/>
+          <a:ext cx="0" cy="0"/>
+          <a:chOff x="0" y="0"/>
+          <a:chExt cx="0" cy="0"/>
+        </a:xfrm>
+      </p:grpSpPr>
+      <p:sp>
+        <p:nvSpPr>
+          <p:cNvPr id="307217677" name="Google Shape;17;p7"/>
+          <p:cNvSpPr txBox="1"/>
+          <p:nvPr>
+            <p:ph type="body" idx="1"/>
+          </p:nvPr>
+        </p:nvSpPr>
+        <p:spPr bwMode="auto">
+          <a:prstGeom prst="rect">
+            <a:avLst/>
+          </a:prstGeom>
+          <a:noFill/>
+          <a:ln>
+            <a:noFill/>
+          </a:ln>
+        </p:spPr>
+        <p:txBody>
+          <a:bodyPr/>
+          <a:lstStyle/>
+          <a:p>
+            <a:pPr>
+              <a:defRPr/>
+            </a:pPr>
+            <a:r>
+              <a:rPr lang="fr-FR"/>
+              <a:t>Action</a:t>
+            </a:r>
+            <a:endParaRPr/>
+          </a:p>
+        </p:txBody>
+      </p:sp>
+      <p:sp>
+        <p:nvSpPr>
+          <p:cNvPr id="1370082327" name="Google Shape;18;p7"/>
+          <p:cNvSpPr txBox="1"/>
+          <p:nvPr>
+            <p:ph type="sldNum" idx="12"/>
+          </p:nvPr>
+        </p:nvSpPr>
+        <p:spPr bwMode="auto">
+          <a:prstGeom prst="rect">
+            <a:avLst/>
+          </a:prstGeom>
+          <a:noFill/>
+          <a:ln>
+            <a:noFill/>
+          </a:ln>
+        </p:spPr>
+        <p:txBody>
+          <a:bodyPr/>
+          <a:lstStyle/>
+          <a:p>
+            <a:pPr marL="0" lvl="0" indent="0" algn="r" rtl="0">
+              <a:spcBef>
+                <a:spcPts val="0"/>
+              </a:spcBef>
+              <a:spcAft>
+                <a:spcPts val="0"/>
+              </a:spcAft>
+              <a:buNone/>
+              <a:defRPr/>
+            </a:pPr>
+            <a:fld id="{376E7010-924D-E959-CB66-EC764FD7A088}" type="slidenum">
+              <a:rPr lang="en-US"/>
+              <a:t>11</a:t>
+            </a:fld>
+            <a:endParaRPr/>
+          </a:p>
+        </p:txBody>
+      </p:sp>
+      <p:pic>
+        <p:nvPicPr>
+          <p:cNvPr id="1993936760" name="Google Shape;215;p12" descr="Capture d’écran 2026-09-28 à 10.30.37.png"/>
+          <p:cNvPicPr/>
+          <p:nvPr/>
+        </p:nvPicPr>
+        <p:blipFill rotWithShape="1">
+          <a:blip r:embed="rId3">
+            <a:alphaModFix/>
+          </a:blip>
+          <a:srcRect l="0" t="0" r="0" b="0"/>
+          <a:stretch/>
+        </p:blipFill>
+        <p:spPr bwMode="auto">
+          <a:xfrm flipH="0" flipV="0">
+            <a:off x="57150" y="197939"/>
+            <a:ext cx="3506718" cy="3915079"/>
+          </a:xfrm>
+          <a:prstGeom prst="rect">
+            <a:avLst/>
+          </a:prstGeom>
+          <a:noFill/>
+          <a:ln>
+            <a:noFill/>
+          </a:ln>
+        </p:spPr>
+      </p:pic>
+      <p:pic>
+        <p:nvPicPr>
+          <p:cNvPr id="493959334" name="Google Shape;217;p12" descr="Capture d’écran 2026-09-28 à 11.01.58.png"/>
+          <p:cNvPicPr/>
+          <p:nvPr/>
+        </p:nvPicPr>
+        <p:blipFill rotWithShape="1">
+          <a:blip r:embed="rId4">
+            <a:alphaModFix/>
+          </a:blip>
+          <a:srcRect l="0" t="0" r="0" b="0"/>
+          <a:stretch/>
+        </p:blipFill>
+        <p:spPr bwMode="auto">
+          <a:xfrm flipH="0" flipV="0">
+            <a:off x="4479174" y="1950437"/>
+            <a:ext cx="4325163" cy="2162581"/>
+          </a:xfrm>
+          <a:prstGeom prst="rect">
+            <a:avLst/>
+          </a:prstGeom>
+          <a:noFill/>
+          <a:ln>
+            <a:noFill/>
+          </a:ln>
+        </p:spPr>
+      </p:pic>
+    </p:spTree>
+  </p:cSld>
+  <p:clrMapOvr>
+    <a:masterClrMapping/>
+  </p:clrMapOvr>
+  <mc:AlternateContent xmlns:mc="http://schemas.openxmlformats.org/markup-compatibility/2006">
+    <mc:Choice xmlns:p159="http://schemas.microsoft.com/office/powerpoint/2015/09/main" xmlns:p14="http://schemas.microsoft.com/office/powerpoint/2010/main" Requires="p159">
+      <p:transition p14:dur="500" advClick="1"/>
+    </mc:Choice>
+    <mc:Fallback>
+      <p:transition advClick="1"/>
+    </mc:Fallback>
+  </mc:AlternateContent>
+</p:sld>
+</file>
+
+<file path=ppt/slides/slide13.xml><?xml version="1.0" encoding="utf-8"?>
+<p:sld xmlns:a="http://schemas.openxmlformats.org/drawingml/2006/main" xmlns:r="http://schemas.openxmlformats.org/officeDocument/2006/relationships" xmlns:p="http://schemas.openxmlformats.org/presentationml/2006/main" xmlns:m="http://schemas.openxmlformats.org/officeDocument/2006/math" xmlns:w="http://schemas.openxmlformats.org/wordprocessingml/2006/main" xmlns:mc="http://schemas.openxmlformats.org/markup-compatibility/2006" showMasterPhAnim="0" showMasterSp="1" show="1">
+  <p:cSld name="">
+    <p:spTree>
+      <p:nvGrpSpPr>
+        <p:cNvPr id="1" name=""/>
+        <p:cNvGrpSpPr/>
+        <p:nvPr/>
+      </p:nvGrpSpPr>
+      <p:grpSpPr bwMode="auto">
+        <a:xfrm>
+          <a:off x="0" y="0"/>
+          <a:ext cx="0" cy="0"/>
+          <a:chOff x="0" y="0"/>
+          <a:chExt cx="0" cy="0"/>
+        </a:xfrm>
+      </p:grpSpPr>
+      <p:sp>
+        <p:nvSpPr>
+          <p:cNvPr id="933129984" name="Google Shape;82;p1"/>
+          <p:cNvSpPr txBox="1"/>
+          <p:nvPr>
+            <p:ph type="title"/>
+          </p:nvPr>
+        </p:nvSpPr>
+        <p:spPr bwMode="auto">
+          <a:xfrm flipH="0" flipV="0">
+            <a:off x="1410498" y="1119272"/>
+            <a:ext cx="7028298" cy="933597"/>
+          </a:xfrm>
+          <a:prstGeom prst="rect">
+            <a:avLst/>
+          </a:prstGeom>
+          <a:noFill/>
+          <a:ln>
+            <a:noFill/>
+          </a:ln>
+        </p:spPr>
+        <p:txBody>
+          <a:bodyPr spcFirstLastPara="1" wrap="square" lIns="91397" tIns="91397" rIns="91397" bIns="91397" anchor="b" anchorCtr="0">
+            <a:noAutofit/>
+          </a:bodyPr>
+          <a:lstStyle/>
+          <a:p>
+            <a:pPr marL="0" marR="0" lvl="0" indent="0" algn="l" rtl="0">
+              <a:lnSpc>
+                <a:spcPct val="100000"/>
+              </a:lnSpc>
+              <a:spcBef>
+                <a:spcPts val="0"/>
+              </a:spcBef>
+              <a:spcAft>
+                <a:spcPts val="0"/>
+              </a:spcAft>
+              <a:buClr>
+                <a:srgbClr val="FFFFFF"/>
+              </a:buClr>
+              <a:buSzPts val="4200"/>
+              <a:buFont typeface="Open Sans"/>
+              <a:buNone/>
+              <a:defRPr/>
+            </a:pPr>
+            <a:r>
+              <a:rPr lang="en-US" sz="3600" b="0" i="0" u="none" strike="noStrike" cap="none" spc="0">
+                <a:solidFill>
+                  <a:srgbClr val="FFFFFF"/>
+                </a:solidFill>
+                <a:latin typeface="Inter"/>
+                <a:ea typeface="Inter"/>
+                <a:cs typeface="Inter"/>
+              </a:rPr>
+              <a:t>draft-toutain-schc-coreconf-management-01</a:t>
+            </a:r>
+            <a:endParaRPr sz="3600"/>
+          </a:p>
+        </p:txBody>
+      </p:sp>
+      <p:sp>
+        <p:nvSpPr>
+          <p:cNvPr id="1577043204" name="Google Shape;83;p1"/>
+          <p:cNvSpPr txBox="1"/>
+          <p:nvPr/>
+        </p:nvSpPr>
+        <p:spPr bwMode="auto">
+          <a:xfrm>
+            <a:off x="486915" y="254439"/>
+            <a:ext cx="4986900" cy="522900"/>
+          </a:xfrm>
+          <a:prstGeom prst="rect">
+            <a:avLst/>
+          </a:prstGeom>
+          <a:noFill/>
+          <a:ln>
+            <a:noFill/>
+          </a:ln>
+        </p:spPr>
+        <p:txBody>
+          <a:bodyPr spcFirstLastPara="1" wrap="square" lIns="91398" tIns="91398" rIns="91398" bIns="91398" anchor="t" anchorCtr="0">
+            <a:noAutofit/>
+          </a:bodyPr>
+          <a:lstStyle/>
+          <a:p>
+            <a:pPr marL="0" marR="0" lvl="0" indent="0" algn="l" rtl="0">
+              <a:lnSpc>
+                <a:spcPct val="100000"/>
+              </a:lnSpc>
+              <a:spcBef>
+                <a:spcPts val="0"/>
+              </a:spcBef>
+              <a:spcAft>
+                <a:spcPts val="0"/>
+              </a:spcAft>
+              <a:buClr>
+                <a:srgbClr val="FFFFFF"/>
+              </a:buClr>
+              <a:buSzPts val="2400"/>
+              <a:buFont typeface="Montserrat"/>
+              <a:buNone/>
+              <a:defRPr/>
+            </a:pPr>
+            <a:r>
+              <a:rPr lang="fr-FR" sz="2100" b="0" i="0" u="none" strike="noStrike" cap="none">
+                <a:solidFill>
+                  <a:srgbClr val="FFFFFF"/>
+                </a:solidFill>
+                <a:latin typeface="Inter"/>
+                <a:ea typeface="Inter"/>
+                <a:cs typeface="Inter"/>
+              </a:rPr>
+              <a:t>Nov </a:t>
+            </a:r>
+            <a:r>
+              <a:rPr lang="fr-FR" sz="2100" b="0" i="0" u="none" strike="noStrike" cap="none">
+                <a:solidFill>
+                  <a:srgbClr val="FFFFFF"/>
+                </a:solidFill>
+                <a:latin typeface="Inter"/>
+                <a:ea typeface="Inter"/>
+                <a:cs typeface="Inter"/>
+              </a:rPr>
+              <a:t>17</a:t>
+            </a:r>
+            <a:r>
+              <a:rPr lang="en-US" sz="2100" b="0" i="0" u="none" strike="noStrike" cap="none" baseline="30000">
+                <a:solidFill>
+                  <a:srgbClr val="FFFFFF"/>
+                </a:solidFill>
+                <a:latin typeface="Inter"/>
+                <a:ea typeface="Inter"/>
+                <a:cs typeface="Inter"/>
+              </a:rPr>
+              <a:t>th</a:t>
+            </a:r>
+            <a:r>
+              <a:rPr lang="en-US" sz="2100" b="0" i="0" u="none" strike="noStrike" cap="none">
+                <a:solidFill>
+                  <a:srgbClr val="FFFFFF"/>
+                </a:solidFill>
+                <a:latin typeface="Inter"/>
+                <a:ea typeface="Inter"/>
+                <a:cs typeface="Inter"/>
+              </a:rPr>
+              <a:t>, 2026</a:t>
+            </a:r>
+            <a:endParaRPr sz="1100" b="0" i="0" u="none" strike="noStrike" cap="none">
+              <a:solidFill>
+                <a:srgbClr val="000000"/>
+              </a:solidFill>
+              <a:latin typeface="Inter"/>
+              <a:ea typeface="Inter"/>
+              <a:cs typeface="Inter"/>
+            </a:endParaRPr>
+          </a:p>
+        </p:txBody>
+      </p:sp>
+      <p:sp>
+        <p:nvSpPr>
+          <p:cNvPr id="1507933306" name="Google Shape;84;p1"/>
+          <p:cNvSpPr txBox="1"/>
+          <p:nvPr/>
+        </p:nvSpPr>
+        <p:spPr bwMode="auto">
+          <a:xfrm>
+            <a:off x="191740" y="4416807"/>
+            <a:ext cx="3783600" cy="441298"/>
+          </a:xfrm>
+          <a:prstGeom prst="rect">
+            <a:avLst/>
+          </a:prstGeom>
+          <a:noFill/>
+          <a:ln>
+            <a:noFill/>
+          </a:ln>
+        </p:spPr>
+        <p:txBody>
+          <a:bodyPr spcFirstLastPara="1" wrap="square" lIns="91422" tIns="91422" rIns="91422" bIns="91422" anchor="t" anchorCtr="0">
+            <a:noAutofit/>
+          </a:bodyPr>
+          <a:lstStyle/>
+          <a:p>
+            <a:pPr marL="0" marR="0" lvl="0" indent="0" algn="l" rtl="0">
+              <a:lnSpc>
+                <a:spcPct val="100000"/>
+              </a:lnSpc>
+              <a:spcBef>
+                <a:spcPts val="0"/>
+              </a:spcBef>
+              <a:spcAft>
+                <a:spcPts val="0"/>
+              </a:spcAft>
+              <a:buClr>
+                <a:srgbClr val="000000"/>
+              </a:buClr>
+              <a:buSzPts val="1200"/>
+              <a:buFont typeface="Arial"/>
+              <a:buNone/>
+              <a:defRPr/>
+            </a:pPr>
+            <a:r>
+              <a:rPr lang="en-US" sz="1200" b="0" i="0" u="none" strike="noStrike" cap="none">
+                <a:solidFill>
+                  <a:srgbClr val="000000"/>
+                </a:solidFill>
+                <a:latin typeface="Inter"/>
+                <a:ea typeface="Inter"/>
+                <a:cs typeface="Inter"/>
+              </a:rPr>
+              <a:t>IETF 12</a:t>
+            </a:r>
+            <a:r>
+              <a:rPr lang="fr-FR" sz="1200" b="0" i="0" u="none" strike="noStrike" cap="none">
+                <a:solidFill>
+                  <a:srgbClr val="000000"/>
+                </a:solidFill>
+                <a:latin typeface="Inter"/>
+                <a:ea typeface="Inter"/>
+                <a:cs typeface="Inter"/>
+              </a:rPr>
+              <a:t>7</a:t>
+            </a:r>
+            <a:r>
+              <a:rPr lang="en-US" sz="1200" b="0" i="0" u="none" strike="noStrike" cap="none">
+                <a:solidFill>
+                  <a:srgbClr val="000000"/>
+                </a:solidFill>
+                <a:latin typeface="Inter"/>
+                <a:ea typeface="Inter"/>
+                <a:cs typeface="Inter"/>
+              </a:rPr>
+              <a:t>, </a:t>
+            </a:r>
+            <a:r>
+              <a:rPr lang="fr-FR" sz="1200" b="0" i="0" u="none" strike="noStrike" cap="none">
+                <a:solidFill>
+                  <a:srgbClr val="000000"/>
+                </a:solidFill>
+                <a:latin typeface="Inter"/>
+                <a:ea typeface="Inter"/>
+                <a:cs typeface="Inter"/>
+              </a:rPr>
+              <a:t>San Francisco</a:t>
+            </a:r>
+            <a:endParaRPr sz="1200" b="0" i="0" u="none" strike="noStrike" cap="none">
+              <a:solidFill>
+                <a:srgbClr val="000000"/>
+              </a:solidFill>
+              <a:latin typeface="Inter"/>
+              <a:ea typeface="Inter"/>
+              <a:cs typeface="Inter"/>
+            </a:endParaRPr>
+          </a:p>
+          <a:p>
+            <a:pPr marL="0" marR="0" lvl="0" indent="0" algn="l" rtl="0">
+              <a:lnSpc>
+                <a:spcPct val="100000"/>
+              </a:lnSpc>
+              <a:spcBef>
+                <a:spcPts val="0"/>
+              </a:spcBef>
+              <a:spcAft>
+                <a:spcPts val="0"/>
+              </a:spcAft>
+              <a:buClr>
+                <a:srgbClr val="000000"/>
+              </a:buClr>
+              <a:buSzPts val="1200"/>
+              <a:buFont typeface="Arial"/>
+              <a:buNone/>
+              <a:defRPr/>
+            </a:pPr>
+            <a:endParaRPr sz="1200" b="0" i="0" u="none" strike="noStrike" cap="none">
+              <a:solidFill>
+                <a:srgbClr val="000000"/>
+              </a:solidFill>
+              <a:latin typeface="Inter"/>
+              <a:ea typeface="Inter"/>
+              <a:cs typeface="Inter"/>
+            </a:endParaRPr>
+          </a:p>
+          <a:p>
+            <a:pPr marL="0" marR="0" lvl="0" indent="0" algn="l" rtl="0">
+              <a:lnSpc>
+                <a:spcPct val="100000"/>
+              </a:lnSpc>
+              <a:spcBef>
+                <a:spcPts val="0"/>
+              </a:spcBef>
+              <a:spcAft>
+                <a:spcPts val="0"/>
+              </a:spcAft>
+              <a:buClr>
+                <a:srgbClr val="000000"/>
+              </a:buClr>
+              <a:buSzPts val="1200"/>
+              <a:buFont typeface="Arial"/>
+              <a:buNone/>
+              <a:defRPr/>
+            </a:pPr>
+            <a:endParaRPr sz="1200" b="0" i="0" u="none" strike="noStrike" cap="none">
+              <a:solidFill>
+                <a:srgbClr val="000000"/>
+              </a:solidFill>
+              <a:latin typeface="Inter"/>
+              <a:ea typeface="Inter"/>
+              <a:cs typeface="Inter"/>
+            </a:endParaRPr>
+          </a:p>
+        </p:txBody>
+      </p:sp>
+      <p:sp>
+        <p:nvSpPr>
+          <p:cNvPr id="1859602534" name="Google Shape;85;p1"/>
+          <p:cNvSpPr txBox="1"/>
+          <p:nvPr/>
+        </p:nvSpPr>
+        <p:spPr bwMode="auto">
+          <a:xfrm flipH="0" flipV="0">
+            <a:off x="707631" y="2318104"/>
+            <a:ext cx="8085296" cy="667800"/>
+          </a:xfrm>
+          <a:prstGeom prst="rect">
+            <a:avLst/>
+          </a:prstGeom>
+          <a:noFill/>
+          <a:ln>
+            <a:noFill/>
+          </a:ln>
+        </p:spPr>
+        <p:txBody>
+          <a:bodyPr spcFirstLastPara="1" wrap="square" lIns="91422" tIns="91422" rIns="91422" bIns="91422" anchor="t" anchorCtr="0">
+            <a:noAutofit/>
+          </a:bodyPr>
+          <a:lstStyle/>
+          <a:p>
+            <a:pPr>
+              <a:defRPr/>
+            </a:pPr>
+            <a:r>
+              <a:rPr lang="en-US" sz="2400" b="0" i="0" u="none" strike="noStrike" cap="none">
+                <a:solidFill>
+                  <a:srgbClr val="FFF2CC"/>
+                </a:solidFill>
+                <a:latin typeface="Inter"/>
+                <a:ea typeface="Inter"/>
+                <a:cs typeface="Inter"/>
+              </a:rPr>
+              <a:t>Authors: </a:t>
+            </a:r>
+            <a:r>
+              <a:rPr lang="en-US" sz="2400" b="0" i="0" u="none" strike="noStrike" cap="none" spc="0">
+                <a:solidFill>
+                  <a:srgbClr val="FFF2CC"/>
+                </a:solidFill>
+                <a:latin typeface="Inter"/>
+                <a:ea typeface="Inter"/>
+                <a:cs typeface="Inter"/>
+              </a:rPr>
+              <a:t> </a:t>
+            </a:r>
+            <a:r>
+              <a:rPr lang="en-US" sz="2400" b="0" i="0" u="none" strike="noStrike" cap="none" spc="0">
+                <a:solidFill>
+                  <a:srgbClr val="FFF2CC"/>
+                </a:solidFill>
+                <a:latin typeface="Inter"/>
+                <a:ea typeface="Inter"/>
+                <a:cs typeface="Inter"/>
+              </a:rPr>
+              <a:t> </a:t>
+            </a:r>
+            <a:r>
+              <a:rPr lang="fr-FR" sz="2400" b="0" i="0" u="none" strike="noStrike" cap="none" spc="0">
+                <a:solidFill>
+                  <a:srgbClr val="FFF2CC"/>
+                </a:solidFill>
+                <a:latin typeface="Inter"/>
+                <a:ea typeface="Inter"/>
+                <a:cs typeface="Inter"/>
+              </a:rPr>
+              <a:t>A. Minaburo</a:t>
+            </a:r>
+            <a:r>
+              <a:rPr lang="fr-FR" sz="2400" b="0" i="0" u="none" strike="noStrike" cap="none" spc="0">
+                <a:solidFill>
+                  <a:srgbClr val="FFF2CC"/>
+                </a:solidFill>
+                <a:latin typeface="Inter"/>
+                <a:ea typeface="Inter"/>
+                <a:cs typeface="Inter"/>
+              </a:rPr>
+              <a:t>, </a:t>
+            </a:r>
+            <a:r>
+              <a:rPr lang="en-US" sz="2400" b="0" i="0" u="none" strike="noStrike" cap="none" spc="0">
+                <a:solidFill>
+                  <a:srgbClr val="FFF2CC"/>
+                </a:solidFill>
+                <a:latin typeface="Inter"/>
+                <a:ea typeface="Inter"/>
+                <a:cs typeface="Inter"/>
+              </a:rPr>
+              <a:t>L. Toutain</a:t>
+            </a:r>
+            <a:r>
+              <a:rPr lang="fr-FR" sz="2400" b="0" i="0" u="none" strike="noStrike" cap="none" spc="0">
+                <a:solidFill>
+                  <a:srgbClr val="FFF2CC"/>
+                </a:solidFill>
+                <a:latin typeface="Inter"/>
+                <a:ea typeface="Inter"/>
+                <a:cs typeface="Inter"/>
+              </a:rPr>
+              <a:t>, J. A. Fernandez, M. Dumay, S. Sirohi</a:t>
+            </a:r>
+            <a:endParaRPr lang="en-US" sz="2400" b="0" i="0" u="none" strike="noStrike" cap="none" spc="0">
+              <a:solidFill>
+                <a:srgbClr val="FFF2CC"/>
+              </a:solidFill>
+              <a:latin typeface="Inter"/>
+              <a:cs typeface="Inter"/>
+            </a:endParaRPr>
+          </a:p>
+        </p:txBody>
+      </p:sp>
+      <p:pic>
+        <p:nvPicPr>
+          <p:cNvPr id="1664777050" name="Google Shape;86;p1"/>
+          <p:cNvPicPr/>
+          <p:nvPr/>
+        </p:nvPicPr>
+        <p:blipFill rotWithShape="1">
+          <a:blip r:embed="rId3">
+            <a:alphaModFix/>
+          </a:blip>
+          <a:srcRect l="9711" t="41600" r="22260" b="24843"/>
+          <a:stretch/>
+        </p:blipFill>
+        <p:spPr bwMode="auto">
+          <a:xfrm>
+            <a:off x="3247923" y="4253647"/>
+            <a:ext cx="2861894" cy="767619"/>
+          </a:xfrm>
+          <a:prstGeom prst="rect">
+            <a:avLst/>
+          </a:prstGeom>
+          <a:noFill/>
+          <a:ln>
+            <a:noFill/>
+          </a:ln>
+        </p:spPr>
+      </p:pic>
+      <p:sp>
+        <p:nvSpPr>
+          <p:cNvPr id="1604292542" name="Google Shape;87;p1"/>
+          <p:cNvSpPr txBox="1"/>
+          <p:nvPr/>
+        </p:nvSpPr>
+        <p:spPr bwMode="auto">
+          <a:xfrm>
+            <a:off x="707634" y="3178278"/>
+            <a:ext cx="5724900" cy="667800"/>
+          </a:xfrm>
+          <a:prstGeom prst="rect">
+            <a:avLst/>
+          </a:prstGeom>
+          <a:noFill/>
+          <a:ln>
+            <a:noFill/>
+          </a:ln>
+        </p:spPr>
+        <p:txBody>
+          <a:bodyPr spcFirstLastPara="1" wrap="square" lIns="91422" tIns="91422" rIns="91422" bIns="91422" anchor="t" anchorCtr="0">
+            <a:noAutofit/>
+          </a:bodyPr>
+          <a:lstStyle/>
+          <a:p>
+            <a:pPr marL="0" marR="0" lvl="0" indent="0" algn="l" rtl="0">
+              <a:lnSpc>
+                <a:spcPct val="110000"/>
+              </a:lnSpc>
+              <a:spcBef>
+                <a:spcPts val="300"/>
+              </a:spcBef>
+              <a:spcAft>
+                <a:spcPts val="0"/>
+              </a:spcAft>
+              <a:buClr>
+                <a:srgbClr val="000000"/>
+              </a:buClr>
+              <a:buSzPts val="2400"/>
+              <a:buFont typeface="Arial"/>
+              <a:buNone/>
+              <a:defRPr/>
+            </a:pPr>
+            <a:r>
+              <a:rPr lang="en-US" sz="2400" b="0" i="0" u="none" strike="noStrike" cap="none">
+                <a:solidFill>
+                  <a:srgbClr val="FFF2CC"/>
+                </a:solidFill>
+                <a:latin typeface="Inter"/>
+                <a:ea typeface="Inter"/>
+                <a:cs typeface="Inter"/>
+              </a:rPr>
+              <a:t>Presenter: L. Toutain</a:t>
+            </a:r>
+            <a:endParaRPr sz="2400" b="0" i="0" u="none" strike="noStrike" cap="none">
+              <a:solidFill>
+                <a:srgbClr val="FFF2CC"/>
+              </a:solidFill>
+              <a:latin typeface="Inter"/>
+              <a:ea typeface="Inter"/>
+              <a:cs typeface="Inter"/>
+            </a:endParaRPr>
+          </a:p>
+        </p:txBody>
+      </p:sp>
+    </p:spTree>
+  </p:cSld>
+  <p:clrMapOvr>
+    <a:masterClrMapping/>
+  </p:clrMapOvr>
+  <mc:AlternateContent xmlns:mc="http://schemas.openxmlformats.org/markup-compatibility/2006">
+    <mc:Choice xmlns:p159="http://schemas.microsoft.com/office/powerpoint/2015/09/main" xmlns:p14="http://schemas.microsoft.com/office/powerpoint/2010/main" Requires="p159">
+      <p:transition p14:dur="500" advClick="1"/>
+    </mc:Choice>
+    <mc:Fallback>
+      <p:transition advClick="1"/>
+    </mc:Fallback>
+  </mc:AlternateContent>
+</p:sld>
+</file>
+
+<file path=ppt/slides/slide14.xml><?xml version="1.0" encoding="utf-8"?>
+<p:sld xmlns:a="http://schemas.openxmlformats.org/drawingml/2006/main" xmlns:r="http://schemas.openxmlformats.org/officeDocument/2006/relationships" xmlns:p="http://schemas.openxmlformats.org/presentationml/2006/main" xmlns:m="http://schemas.openxmlformats.org/officeDocument/2006/math" xmlns:w="http://schemas.openxmlformats.org/wordprocessingml/2006/main" xmlns:mc="http://schemas.openxmlformats.org/markup-compatibility/2006" showMasterPhAnim="0" showMasterSp="1" show="1">
+  <p:cSld name="">
+    <p:spTree>
+      <p:nvGrpSpPr>
+        <p:cNvPr id="1" name=""/>
+        <p:cNvGrpSpPr/>
+        <p:nvPr/>
+      </p:nvGrpSpPr>
+      <p:grpSpPr bwMode="auto">
+        <a:xfrm>
+          <a:off x="0" y="0"/>
+          <a:ext cx="0" cy="0"/>
+          <a:chOff x="0" y="0"/>
+          <a:chExt cx="0" cy="0"/>
+        </a:xfrm>
+      </p:grpSpPr>
+      <p:sp>
+        <p:nvSpPr>
+          <p:cNvPr id="530162833" name="Google Shape;17;p7"/>
+          <p:cNvSpPr txBox="1"/>
+          <p:nvPr>
+            <p:ph type="body" idx="1"/>
+          </p:nvPr>
+        </p:nvSpPr>
+        <p:spPr bwMode="auto">
+          <a:prstGeom prst="rect">
+            <a:avLst/>
+          </a:prstGeom>
+          <a:noFill/>
+          <a:ln>
+            <a:noFill/>
+          </a:ln>
+        </p:spPr>
+        <p:txBody>
+          <a:bodyPr/>
+          <a:lstStyle/>
+          <a:p>
+            <a:pPr>
+              <a:defRPr/>
+            </a:pPr>
+            <a:r>
+              <a:rPr lang="fr-FR"/>
+              <a:t>Objectives</a:t>
+            </a:r>
+            <a:endParaRPr/>
+          </a:p>
+        </p:txBody>
+      </p:sp>
+      <p:sp>
+        <p:nvSpPr>
+          <p:cNvPr id="1725459011" name="Google Shape;18;p7"/>
+          <p:cNvSpPr txBox="1"/>
+          <p:nvPr>
+            <p:ph type="sldNum" idx="12"/>
+          </p:nvPr>
+        </p:nvSpPr>
+        <p:spPr bwMode="auto">
+          <a:prstGeom prst="rect">
+            <a:avLst/>
+          </a:prstGeom>
+          <a:noFill/>
+          <a:ln>
+            <a:noFill/>
+          </a:ln>
+        </p:spPr>
+        <p:txBody>
+          <a:bodyPr/>
+          <a:lstStyle/>
+          <a:p>
+            <a:pPr marL="0" lvl="0" indent="0" algn="r" rtl="0">
+              <a:spcBef>
+                <a:spcPts val="0"/>
+              </a:spcBef>
+              <a:spcAft>
+                <a:spcPts val="0"/>
+              </a:spcAft>
+              <a:buNone/>
+              <a:defRPr/>
+            </a:pPr>
+            <a:fld id="{81967834-0FE6-7AEF-36C1-F6A36F77BC22}" type="slidenum">
+              <a:rPr lang="en-US"/>
+              <a:t>12</a:t>
+            </a:fld>
+            <a:endParaRPr/>
           </a:p>
         </p:txBody>
       </p:sp>
@@ -5316,7 +7716,7 @@
       </p:grpSpPr>
       <p:sp>
         <p:nvSpPr>
-          <p:cNvPr id="1555466848" name="Google Shape;17;p7"/>
+          <p:cNvPr id="80804541" name="Google Shape;17;p7"/>
           <p:cNvSpPr txBox="1"/>
           <p:nvPr>
             <p:ph type="body" idx="1"/>
@@ -5348,7 +7748,7 @@
       </p:sp>
       <p:sp>
         <p:nvSpPr>
-          <p:cNvPr id="865539312" name="Google Shape;18;p7"/>
+          <p:cNvPr id="2089490714" name="Google Shape;18;p7"/>
           <p:cNvSpPr txBox="1"/>
           <p:nvPr>
             <p:ph type="sldNum" idx="12"/>
@@ -5387,7 +7787,7 @@
       </p:sp>
       <p:sp>
         <p:nvSpPr>
-          <p:cNvPr id="1757110671" name="Carré corné 3"/>
+          <p:cNvPr id="1590150237" name="Carré corné 3"/>
           <p:cNvSpPr/>
           <p:nvPr/>
         </p:nvSpPr>
@@ -5461,7 +7861,7 @@
       </p:sp>
       <p:sp>
         <p:nvSpPr>
-          <p:cNvPr id="180846550" name="Google Shape;82;p1"/>
+          <p:cNvPr id="1401883928" name="Google Shape;82;p1"/>
           <p:cNvSpPr txBox="1"/>
           <p:nvPr/>
         </p:nvSpPr>
@@ -5760,7 +8160,7 @@
       </p:sp>
       <p:sp>
         <p:nvSpPr>
-          <p:cNvPr id="638149980" name="Rectangle 5"/>
+          <p:cNvPr id="1338122916" name="Rectangle 5"/>
           <p:cNvSpPr txBox="1"/>
           <p:nvPr/>
         </p:nvSpPr>
@@ -5802,7 +8202,7 @@
       </p:sp>
       <p:cxnSp>
         <p:nvCxnSpPr>
-          <p:cNvPr id="451047578" name="Ligne 12"/>
+          <p:cNvPr id="1465657355" name="Ligne 12"/>
           <p:cNvCxnSpPr/>
           <p:nvPr/>
         </p:nvCxnSpPr>
@@ -5873,7 +8273,7 @@
       </p:grpSpPr>
       <p:sp>
         <p:nvSpPr>
-          <p:cNvPr id="1279823008" name="Google Shape;17;p7"/>
+          <p:cNvPr id="1207103171" name="Google Shape;17;p7"/>
           <p:cNvSpPr txBox="1"/>
           <p:nvPr>
             <p:ph type="body" idx="1"/>
@@ -5905,7 +8305,7 @@
       </p:sp>
       <p:sp>
         <p:nvSpPr>
-          <p:cNvPr id="2047032551" name="Google Shape;18;p7"/>
+          <p:cNvPr id="873498557" name="Google Shape;18;p7"/>
           <p:cNvSpPr txBox="1"/>
           <p:nvPr>
             <p:ph type="sldNum" idx="12"/>
@@ -5944,7 +8344,7 @@
       </p:sp>
       <p:sp>
         <p:nvSpPr>
-          <p:cNvPr id="1657315408" name="Carré corné 3"/>
+          <p:cNvPr id="1165386296" name="Carré corné 3"/>
           <p:cNvSpPr/>
           <p:nvPr/>
         </p:nvSpPr>
@@ -6018,7 +8418,7 @@
       </p:sp>
       <p:sp>
         <p:nvSpPr>
-          <p:cNvPr id="496154623" name="Google Shape;82;p1"/>
+          <p:cNvPr id="634731486" name="Google Shape;82;p1"/>
           <p:cNvSpPr txBox="1"/>
           <p:nvPr/>
         </p:nvSpPr>
@@ -6317,7 +8717,7 @@
       </p:sp>
       <p:sp>
         <p:nvSpPr>
-          <p:cNvPr id="64521673" name="Rectangle 5"/>
+          <p:cNvPr id="826928100" name="Rectangle 5"/>
           <p:cNvSpPr txBox="1"/>
           <p:nvPr/>
         </p:nvSpPr>
@@ -6359,7 +8759,7 @@
       </p:sp>
       <p:sp>
         <p:nvSpPr>
-          <p:cNvPr id="286870988" name="Carré corné 6"/>
+          <p:cNvPr id="749009888" name="Carré corné 6"/>
           <p:cNvSpPr/>
           <p:nvPr/>
         </p:nvSpPr>
@@ -6429,7 +8829,7 @@
       </p:sp>
       <p:sp>
         <p:nvSpPr>
-          <p:cNvPr id="1212529490" name="Carré corné 7"/>
+          <p:cNvPr id="1105739123" name="Carré corné 7"/>
           <p:cNvSpPr/>
           <p:nvPr/>
         </p:nvSpPr>
@@ -6499,7 +8899,7 @@
       </p:sp>
       <p:cxnSp>
         <p:nvCxnSpPr>
-          <p:cNvPr id="1754178402" name="Ligne 12"/>
+          <p:cNvPr id="1625120612" name="Ligne 12"/>
           <p:cNvCxnSpPr/>
           <p:nvPr/>
         </p:nvCxnSpPr>
@@ -6570,7 +8970,7 @@
       </p:grpSpPr>
       <p:sp>
         <p:nvSpPr>
-          <p:cNvPr id="2102925635" name="Google Shape;17;p7"/>
+          <p:cNvPr id="1620998499" name="Google Shape;17;p7"/>
           <p:cNvSpPr txBox="1"/>
           <p:nvPr>
             <p:ph type="body" idx="1"/>
@@ -6602,7 +9002,7 @@
       </p:sp>
       <p:sp>
         <p:nvSpPr>
-          <p:cNvPr id="1522896787" name="Google Shape;18;p7"/>
+          <p:cNvPr id="503928836" name="Google Shape;18;p7"/>
           <p:cNvSpPr txBox="1"/>
           <p:nvPr>
             <p:ph type="sldNum" idx="12"/>
@@ -6641,7 +9041,7 @@
       </p:sp>
       <p:sp>
         <p:nvSpPr>
-          <p:cNvPr id="1534575273" name="Carré corné 3"/>
+          <p:cNvPr id="1798498004" name="Carré corné 3"/>
           <p:cNvSpPr/>
           <p:nvPr/>
         </p:nvSpPr>
@@ -6715,7 +9115,7 @@
       </p:sp>
       <p:sp>
         <p:nvSpPr>
-          <p:cNvPr id="1189876566" name="Google Shape;82;p1"/>
+          <p:cNvPr id="408774635" name="Google Shape;82;p1"/>
           <p:cNvSpPr txBox="1"/>
           <p:nvPr/>
         </p:nvSpPr>
@@ -7014,7 +9414,7 @@
       </p:sp>
       <p:sp>
         <p:nvSpPr>
-          <p:cNvPr id="1073141127" name="Rectangle 5"/>
+          <p:cNvPr id="1163574333" name="Rectangle 5"/>
           <p:cNvSpPr txBox="1"/>
           <p:nvPr/>
         </p:nvSpPr>
@@ -7056,7 +9456,7 @@
       </p:sp>
       <p:sp>
         <p:nvSpPr>
-          <p:cNvPr id="1113806893" name="Carré corné 6"/>
+          <p:cNvPr id="1900860094" name="Carré corné 6"/>
           <p:cNvSpPr/>
           <p:nvPr/>
         </p:nvSpPr>
@@ -7126,7 +9526,7 @@
       </p:sp>
       <p:sp>
         <p:nvSpPr>
-          <p:cNvPr id="511887220" name="Carré corné 7"/>
+          <p:cNvPr id="912679452" name="Carré corné 7"/>
           <p:cNvSpPr/>
           <p:nvPr/>
         </p:nvSpPr>
@@ -7196,7 +9596,7 @@
       </p:sp>
       <p:sp>
         <p:nvSpPr>
-          <p:cNvPr id="667314525" name="Carré corné 8"/>
+          <p:cNvPr id="957749550" name="Carré corné 8"/>
           <p:cNvSpPr/>
           <p:nvPr/>
         </p:nvSpPr>
@@ -7269,7 +9669,7 @@
       </p:sp>
       <p:sp>
         <p:nvSpPr>
-          <p:cNvPr id="118894057" name="Carré corné 9"/>
+          <p:cNvPr id="1552576603" name="Carré corné 9"/>
           <p:cNvSpPr/>
           <p:nvPr/>
         </p:nvSpPr>
@@ -7364,7 +9764,7 @@
       </p:sp>
       <p:sp>
         <p:nvSpPr>
-          <p:cNvPr id="321249110" name="Accolade fermante 11"/>
+          <p:cNvPr id="677051800" name="Accolade fermante 11"/>
           <p:cNvSpPr/>
           <p:nvPr/>
         </p:nvSpPr>
@@ -7399,7 +9799,7 @@
       </p:sp>
       <p:cxnSp>
         <p:nvCxnSpPr>
-          <p:cNvPr id="2029309662" name="Ligne 12"/>
+          <p:cNvPr id="452540013" name="Ligne 12"/>
           <p:cNvCxnSpPr/>
           <p:nvPr/>
         </p:nvCxnSpPr>
@@ -7470,7 +9870,7 @@
       </p:grpSpPr>
       <p:sp>
         <p:nvSpPr>
-          <p:cNvPr id="1106695170" name="Google Shape;82;p1"/>
+          <p:cNvPr id="1895884200" name="Google Shape;82;p1"/>
           <p:cNvSpPr txBox="1"/>
           <p:nvPr>
             <p:ph type="title"/>
@@ -7530,7 +9930,7 @@
       </p:sp>
       <p:sp>
         <p:nvSpPr>
-          <p:cNvPr id="422788289" name="Google Shape;83;p1"/>
+          <p:cNvPr id="1761413960" name="Google Shape;83;p1"/>
           <p:cNvSpPr txBox="1"/>
           <p:nvPr/>
         </p:nvSpPr>
@@ -7628,7 +10028,7 @@
       </p:sp>
       <p:sp>
         <p:nvSpPr>
-          <p:cNvPr id="1120045070" name="Google Shape;84;p1"/>
+          <p:cNvPr id="1191628723" name="Google Shape;84;p1"/>
           <p:cNvSpPr txBox="1"/>
           <p:nvPr/>
         </p:nvSpPr>
@@ -7646,7 +10046,7 @@
           </a:ln>
         </p:spPr>
         <p:txBody>
-          <a:bodyPr spcFirstLastPara="1" wrap="square" lIns="91424" tIns="91424" rIns="91424" bIns="91424" anchor="t" anchorCtr="0">
+          <a:bodyPr spcFirstLastPara="1" wrap="square" lIns="91423" tIns="91423" rIns="91423" bIns="91423" anchor="t" anchorCtr="0">
             <a:noAutofit/>
           </a:bodyPr>
           <a:lstStyle/>
@@ -7782,7 +10182,7 @@
       </p:sp>
       <p:sp>
         <p:nvSpPr>
-          <p:cNvPr id="57869075" name="Google Shape;85;p1"/>
+          <p:cNvPr id="879106654" name="Google Shape;85;p1"/>
           <p:cNvSpPr txBox="1"/>
           <p:nvPr/>
         </p:nvSpPr>
@@ -7800,7 +10200,7 @@
           </a:ln>
         </p:spPr>
         <p:txBody>
-          <a:bodyPr spcFirstLastPara="1" wrap="square" lIns="91424" tIns="91424" rIns="91424" bIns="91424" anchor="t" anchorCtr="0">
+          <a:bodyPr spcFirstLastPara="1" wrap="square" lIns="91423" tIns="91423" rIns="91423" bIns="91423" anchor="t" anchorCtr="0">
             <a:noAutofit/>
           </a:bodyPr>
           <a:lstStyle/>
@@ -7929,7 +10329,7 @@
       </p:sp>
       <p:pic>
         <p:nvPicPr>
-          <p:cNvPr id="1570717435" name="Google Shape;86;p1"/>
+          <p:cNvPr id="1292434270" name="Google Shape;86;p1"/>
           <p:cNvPicPr/>
           <p:nvPr/>
         </p:nvPicPr>
@@ -7956,7 +10356,7 @@
       </p:pic>
       <p:sp>
         <p:nvSpPr>
-          <p:cNvPr id="1378941242" name="Google Shape;87;p1"/>
+          <p:cNvPr id="1688575283" name="Google Shape;87;p1"/>
           <p:cNvSpPr txBox="1"/>
           <p:nvPr/>
         </p:nvSpPr>
@@ -7974,7 +10374,7 @@
           </a:ln>
         </p:spPr>
         <p:txBody>
-          <a:bodyPr spcFirstLastPara="1" wrap="square" lIns="91424" tIns="91424" rIns="91424" bIns="91424" anchor="t" anchorCtr="0">
+          <a:bodyPr spcFirstLastPara="1" wrap="square" lIns="91423" tIns="91423" rIns="91423" bIns="91423" anchor="t" anchorCtr="0">
             <a:noAutofit/>
           </a:bodyPr>
           <a:lstStyle/>
@@ -8054,7 +10454,7 @@
       </p:grpSpPr>
       <p:sp>
         <p:nvSpPr>
-          <p:cNvPr id="90302821" name="Google Shape;17;p7"/>
+          <p:cNvPr id="1540940003" name="Google Shape;17;p7"/>
           <p:cNvSpPr txBox="1"/>
           <p:nvPr>
             <p:ph type="body" idx="1"/>
@@ -8082,7 +10482,7 @@
       </p:sp>
       <p:sp>
         <p:nvSpPr>
-          <p:cNvPr id="1784602659" name="Google Shape;18;p7"/>
+          <p:cNvPr id="2065714419" name="Google Shape;18;p7"/>
           <p:cNvSpPr txBox="1"/>
           <p:nvPr>
             <p:ph type="sldNum" idx="12"/>
@@ -8121,7 +10521,7 @@
       </p:sp>
       <p:sp>
         <p:nvSpPr>
-          <p:cNvPr id="819695455" name="Rectangle 3"/>
+          <p:cNvPr id="1822095462" name="Rectangle 3"/>
           <p:cNvSpPr txBox="1"/>
           <p:nvPr/>
         </p:nvSpPr>
@@ -8432,7 +10832,7 @@
       </p:sp>
       <p:sp>
         <p:nvSpPr>
-          <p:cNvPr id="925007111" name="Shape 4"/>
+          <p:cNvPr id="1738362016" name="Shape 4"/>
           <p:cNvSpPr/>
           <p:nvPr/>
         </p:nvSpPr>
@@ -9639,7 +12039,7 @@
       </p:sp>
       <p:sp>
         <p:nvSpPr>
-          <p:cNvPr id="1138324060" name="Rectangle 5"/>
+          <p:cNvPr id="2078569058" name="Rectangle 5"/>
           <p:cNvSpPr/>
           <p:nvPr/>
         </p:nvSpPr>
@@ -9685,7 +12085,7 @@
       </p:sp>
       <p:sp>
         <p:nvSpPr>
-          <p:cNvPr id="1857588152" name="Rectangle 6"/>
+          <p:cNvPr id="18604261" name="Rectangle 6"/>
           <p:cNvSpPr txBox="1"/>
           <p:nvPr/>
         </p:nvSpPr>
@@ -9744,7 +12144,7 @@
       </p:sp>
       <p:sp>
         <p:nvSpPr>
-          <p:cNvPr id="1386781621" name="Rectangle 7"/>
+          <p:cNvPr id="929472342" name="Rectangle 7"/>
           <p:cNvSpPr/>
           <p:nvPr/>
         </p:nvSpPr>
@@ -9792,7 +12192,7 @@
       </p:sp>
       <p:sp>
         <p:nvSpPr>
-          <p:cNvPr id="46328993" name="Rectangle 8"/>
+          <p:cNvPr id="570362150" name="Rectangle 8"/>
           <p:cNvSpPr/>
           <p:nvPr/>
         </p:nvSpPr>
@@ -9840,7 +12240,7 @@
       </p:sp>
       <p:sp>
         <p:nvSpPr>
-          <p:cNvPr id="29366650" name="Rectangle 9"/>
+          <p:cNvPr id="1645241853" name="Rectangle 9"/>
           <p:cNvSpPr txBox="1"/>
           <p:nvPr/>
         </p:nvSpPr>
@@ -9868,7 +12268,7 @@
       </p:sp>
       <p:sp>
         <p:nvSpPr>
-          <p:cNvPr id="615251382" name="Rectangle 10"/>
+          <p:cNvPr id="555306006" name="Rectangle 10"/>
           <p:cNvSpPr/>
           <p:nvPr/>
         </p:nvSpPr>
@@ -9914,7 +12314,7 @@
       </p:sp>
       <p:sp>
         <p:nvSpPr>
-          <p:cNvPr id="2089079252" name="Rectangle 11"/>
+          <p:cNvPr id="625381295" name="Rectangle 11"/>
           <p:cNvSpPr/>
           <p:nvPr/>
         </p:nvSpPr>
@@ -9962,14 +12362,14 @@
       </p:sp>
       <p:sp>
         <p:nvSpPr>
-          <p:cNvPr id="1239220138" name="Rectangle 12"/>
+          <p:cNvPr id="2002740400" name="Rectangle 12"/>
           <p:cNvSpPr txBox="1"/>
           <p:nvPr/>
         </p:nvSpPr>
         <p:spPr bwMode="auto">
           <a:xfrm rot="0" flipH="0" flipV="0">
             <a:off x="214326" y="3361738"/>
-            <a:ext cx="4061181" cy="1158599"/>
+            <a:ext cx="4061180" cy="1158599"/>
           </a:xfrm>
           <a:prstGeom prst="rect">
             <a:avLst/>
@@ -10076,7 +12476,7 @@
       </p:grpSpPr>
       <p:sp>
         <p:nvSpPr>
-          <p:cNvPr id="1540408112" name="Google Shape;17;p7"/>
+          <p:cNvPr id="218920168" name="Google Shape;17;p7"/>
           <p:cNvSpPr txBox="1"/>
           <p:nvPr>
             <p:ph type="body" idx="1"/>
@@ -10108,7 +12508,7 @@
       </p:sp>
       <p:sp>
         <p:nvSpPr>
-          <p:cNvPr id="1292259043" name="Google Shape;18;p7"/>
+          <p:cNvPr id="864827654" name="Google Shape;18;p7"/>
           <p:cNvSpPr txBox="1"/>
           <p:nvPr>
             <p:ph type="sldNum" idx="12"/>
@@ -10147,7 +12547,7 @@
       </p:sp>
       <p:sp>
         <p:nvSpPr>
-          <p:cNvPr id="1614844164" name="Shape 3"/>
+          <p:cNvPr id="1271242498" name="Shape 3"/>
           <p:cNvSpPr/>
           <p:nvPr/>
         </p:nvSpPr>
@@ -11372,7 +13772,7 @@
       </p:sp>
       <p:sp>
         <p:nvSpPr>
-          <p:cNvPr id="2093818464" name="Shape 4"/>
+          <p:cNvPr id="1778036395" name="Shape 4"/>
           <p:cNvSpPr/>
           <p:nvPr/>
         </p:nvSpPr>
@@ -13452,7 +15852,7 @@
       </p:sp>
       <p:sp>
         <p:nvSpPr>
-          <p:cNvPr id="1260300988" name="Rectangle 5"/>
+          <p:cNvPr id="729292707" name="Rectangle 5"/>
           <p:cNvSpPr txBox="1"/>
           <p:nvPr/>
         </p:nvSpPr>
@@ -13484,7 +15884,7 @@
       </p:sp>
       <p:sp>
         <p:nvSpPr>
-          <p:cNvPr id="1742728803" name="Rectangle 6"/>
+          <p:cNvPr id="1892777657" name="Rectangle 6"/>
           <p:cNvSpPr/>
           <p:nvPr/>
         </p:nvSpPr>
@@ -13532,7 +15932,7 @@
       </p:sp>
       <p:sp>
         <p:nvSpPr>
-          <p:cNvPr id="331783431" name="Rectangle 7"/>
+          <p:cNvPr id="293414765" name="Rectangle 7"/>
           <p:cNvSpPr/>
           <p:nvPr/>
         </p:nvSpPr>
@@ -13580,7 +15980,7 @@
       </p:sp>
       <p:sp>
         <p:nvSpPr>
-          <p:cNvPr id="1166739571" name="Rectangle 8"/>
+          <p:cNvPr id="486273595" name="Rectangle 8"/>
           <p:cNvSpPr/>
           <p:nvPr/>
         </p:nvSpPr>
@@ -13628,7 +16028,7 @@
       </p:sp>
       <p:sp>
         <p:nvSpPr>
-          <p:cNvPr id="1276215519" name="Rectangle 9"/>
+          <p:cNvPr id="774319793" name="Rectangle 9"/>
           <p:cNvSpPr txBox="1"/>
           <p:nvPr/>
         </p:nvSpPr>
@@ -13665,7 +16065,7 @@
       </p:sp>
       <p:sp>
         <p:nvSpPr>
-          <p:cNvPr id="2108133909" name="Rectangle 10"/>
+          <p:cNvPr id="497144424" name="Rectangle 10"/>
           <p:cNvSpPr txBox="1"/>
           <p:nvPr/>
         </p:nvSpPr>
@@ -13736,7 +16136,7 @@
       </p:sp>
       <p:sp>
         <p:nvSpPr>
-          <p:cNvPr id="15487373" name="Rectangle 11"/>
+          <p:cNvPr id="2119086371" name="Rectangle 11"/>
           <p:cNvSpPr txBox="1"/>
           <p:nvPr/>
         </p:nvSpPr>
@@ -13801,7 +16201,7 @@
       </p:sp>
       <p:sp>
         <p:nvSpPr>
-          <p:cNvPr id="746860972" name="Rectangle 12"/>
+          <p:cNvPr id="1034892381" name="Rectangle 12"/>
           <p:cNvSpPr/>
           <p:nvPr/>
         </p:nvSpPr>
@@ -13849,7 +16249,7 @@
       </p:sp>
       <p:sp>
         <p:nvSpPr>
-          <p:cNvPr id="1949267855" name="Rectangle 13"/>
+          <p:cNvPr id="1425645630" name="Rectangle 13"/>
           <p:cNvSpPr txBox="1"/>
           <p:nvPr/>
         </p:nvSpPr>
@@ -13931,17 +16331,13 @@
       </p:grpSpPr>
       <p:sp>
         <p:nvSpPr>
-          <p:cNvPr id="40488289" name="Google Shape;82;p1"/>
+          <p:cNvPr id="234270204" name="Google Shape;17;p7"/>
           <p:cNvSpPr txBox="1"/>
           <p:nvPr>
-            <p:ph type="title"/>
+            <p:ph type="body" idx="1"/>
           </p:nvPr>
         </p:nvSpPr>
         <p:spPr bwMode="auto">
-          <a:xfrm flipH="0" flipV="0">
-            <a:off x="1410498" y="1119273"/>
-            <a:ext cx="7028298" cy="933598"/>
-          </a:xfrm>
           <a:prstGeom prst="rect">
             <a:avLst/>
           </a:prstGeom>
@@ -13951,55 +16347,25 @@
           </a:ln>
         </p:spPr>
         <p:txBody>
-          <a:bodyPr spcFirstLastPara="1" wrap="square" lIns="91398" tIns="91398" rIns="91398" bIns="91398" anchor="b" anchorCtr="0">
-            <a:noAutofit/>
-          </a:bodyPr>
+          <a:bodyPr/>
           <a:lstStyle/>
           <a:p>
-            <a:pPr marL="0" marR="0" lvl="0" indent="0" algn="l" rtl="0">
-              <a:lnSpc>
-                <a:spcPct val="100000"/>
-              </a:lnSpc>
-              <a:spcBef>
-                <a:spcPts val="0"/>
-              </a:spcBef>
-              <a:spcAft>
-                <a:spcPts val="0"/>
-              </a:spcAft>
-              <a:buClr>
-                <a:srgbClr val="FFFFFF"/>
-              </a:buClr>
-              <a:buSzPts val="4200"/>
-              <a:buFont typeface="Open Sans"/>
-              <a:buNone/>
-              <a:defRPr/>
-            </a:pPr>
-            <a:r>
-              <a:rPr lang="en-US" sz="3600" b="0" i="0" u="none" strike="noStrike" cap="none" spc="0">
-                <a:solidFill>
-                  <a:srgbClr val="FFFFFF"/>
-                </a:solidFill>
-                <a:latin typeface="Inter"/>
-                <a:ea typeface="Inter"/>
-                <a:cs typeface="Inter"/>
-              </a:rPr>
-              <a:t>draft-ietf-schc-icmpv6-compression-03</a:t>
-            </a:r>
-            <a:endParaRPr sz="3600"/>
+            <a:pPr>
+              <a:defRPr/>
+            </a:pPr>
+            <a:endParaRPr/>
           </a:p>
         </p:txBody>
       </p:sp>
       <p:sp>
         <p:nvSpPr>
-          <p:cNvPr id="1336086316" name="Google Shape;83;p1"/>
+          <p:cNvPr id="1686970782" name="Google Shape;18;p7"/>
           <p:cNvSpPr txBox="1"/>
-          <p:nvPr/>
+          <p:nvPr>
+            <p:ph type="sldNum" idx="12"/>
+          </p:nvPr>
         </p:nvSpPr>
         <p:spPr bwMode="auto">
-          <a:xfrm>
-            <a:off x="486916" y="254439"/>
-            <a:ext cx="4986900" cy="522900"/>
-          </a:xfrm>
           <a:prstGeom prst="rect">
             <a:avLst/>
           </a:prstGeom>
@@ -14009,349 +16375,30 @@
           </a:ln>
         </p:spPr>
         <p:txBody>
-          <a:bodyPr spcFirstLastPara="1" wrap="square" lIns="91399" tIns="91399" rIns="91399" bIns="91399" anchor="t" anchorCtr="0">
-            <a:noAutofit/>
-          </a:bodyPr>
+          <a:bodyPr/>
           <a:lstStyle/>
           <a:p>
-            <a:pPr marL="0" marR="0" lvl="0" indent="0" algn="l" rtl="0">
-              <a:lnSpc>
-                <a:spcPct val="100000"/>
-              </a:lnSpc>
+            <a:pPr marL="0" lvl="0" indent="0" algn="r" rtl="0">
               <a:spcBef>
                 <a:spcPts val="0"/>
               </a:spcBef>
               <a:spcAft>
                 <a:spcPts val="0"/>
               </a:spcAft>
-              <a:buClr>
-                <a:srgbClr val="FFFFFF"/>
-              </a:buClr>
-              <a:buSzPts val="2400"/>
-              <a:buFont typeface="Montserrat"/>
               <a:buNone/>
               <a:defRPr/>
             </a:pPr>
-            <a:r>
-              <a:rPr lang="fr-FR" sz="2100" b="0" i="0" u="none" strike="noStrike" cap="none">
-                <a:solidFill>
-                  <a:srgbClr val="FFFFFF"/>
-                </a:solidFill>
-                <a:latin typeface="Inter"/>
-                <a:ea typeface="Inter"/>
-                <a:cs typeface="Inter"/>
-              </a:rPr>
-              <a:t>Nov </a:t>
-            </a:r>
-            <a:r>
-              <a:rPr lang="fr-FR" sz="2100" b="0" i="0" u="none" strike="noStrike" cap="none">
-                <a:solidFill>
-                  <a:srgbClr val="FFFFFF"/>
-                </a:solidFill>
-                <a:latin typeface="Inter"/>
-                <a:ea typeface="Inter"/>
-                <a:cs typeface="Inter"/>
-              </a:rPr>
-              <a:t>17</a:t>
-            </a:r>
-            <a:r>
-              <a:rPr lang="en-US" sz="2100" b="0" i="0" u="none" strike="noStrike" cap="none" baseline="30000">
-                <a:solidFill>
-                  <a:srgbClr val="FFFFFF"/>
-                </a:solidFill>
-                <a:latin typeface="Inter"/>
-                <a:ea typeface="Inter"/>
-                <a:cs typeface="Inter"/>
-              </a:rPr>
-              <a:t>th</a:t>
-            </a:r>
-            <a:r>
-              <a:rPr lang="en-US" sz="2100" b="0" i="0" u="none" strike="noStrike" cap="none">
-                <a:solidFill>
-                  <a:srgbClr val="FFFFFF"/>
-                </a:solidFill>
-                <a:latin typeface="Inter"/>
-                <a:ea typeface="Inter"/>
-                <a:cs typeface="Inter"/>
-              </a:rPr>
-              <a:t>, 2026</a:t>
-            </a:r>
-            <a:endParaRPr sz="1100" b="0" i="0" u="none" strike="noStrike" cap="none">
-              <a:solidFill>
-                <a:srgbClr val="000000"/>
-              </a:solidFill>
-              <a:latin typeface="Inter"/>
-              <a:ea typeface="Inter"/>
-              <a:cs typeface="Inter"/>
-            </a:endParaRPr>
-          </a:p>
-        </p:txBody>
-      </p:sp>
-      <p:sp>
-        <p:nvSpPr>
-          <p:cNvPr id="13842170" name="Google Shape;84;p1"/>
-          <p:cNvSpPr txBox="1"/>
-          <p:nvPr/>
-        </p:nvSpPr>
-        <p:spPr bwMode="auto">
-          <a:xfrm>
-            <a:off x="191741" y="4416808"/>
-            <a:ext cx="3783600" cy="441299"/>
-          </a:xfrm>
-          <a:prstGeom prst="rect">
-            <a:avLst/>
-          </a:prstGeom>
-          <a:noFill/>
-          <a:ln>
-            <a:noFill/>
-          </a:ln>
-        </p:spPr>
-        <p:txBody>
-          <a:bodyPr spcFirstLastPara="1" wrap="square" lIns="91424" tIns="91424" rIns="91424" bIns="91424" anchor="t" anchorCtr="0">
-            <a:noAutofit/>
-          </a:bodyPr>
-          <a:lstStyle/>
-          <a:p>
-            <a:pPr marL="0" marR="0" lvl="0" indent="0" algn="l" rtl="0">
-              <a:lnSpc>
-                <a:spcPct val="100000"/>
-              </a:lnSpc>
-              <a:spcBef>
-                <a:spcPts val="0"/>
-              </a:spcBef>
-              <a:spcAft>
-                <a:spcPts val="0"/>
-              </a:spcAft>
-              <a:buClr>
-                <a:srgbClr val="000000"/>
-              </a:buClr>
-              <a:buSzPts val="1200"/>
-              <a:buFont typeface="Arial"/>
-              <a:buNone/>
-              <a:defRPr/>
-            </a:pPr>
-            <a:r>
-              <a:rPr lang="en-US" sz="1200" b="0" i="0" u="none" strike="noStrike" cap="none">
-                <a:solidFill>
-                  <a:srgbClr val="000000"/>
-                </a:solidFill>
-                <a:latin typeface="Inter"/>
-                <a:ea typeface="Inter"/>
-                <a:cs typeface="Inter"/>
-              </a:rPr>
-              <a:t>IETF 12</a:t>
-            </a:r>
-            <a:r>
-              <a:rPr lang="fr-FR" sz="1200" b="0" i="0" u="none" strike="noStrike" cap="none">
-                <a:solidFill>
-                  <a:srgbClr val="000000"/>
-                </a:solidFill>
-                <a:latin typeface="Inter"/>
-                <a:ea typeface="Inter"/>
-                <a:cs typeface="Inter"/>
-              </a:rPr>
+            <a:fld id="{50B2FF6A-1878-B734-76D4-76DD2E3541E2}" type="slidenum">
+              <a:rPr lang="en-US"/>
               <a:t>7</a:t>
-            </a:r>
-            <a:r>
-              <a:rPr lang="en-US" sz="1200" b="0" i="0" u="none" strike="noStrike" cap="none">
-                <a:solidFill>
-                  <a:srgbClr val="000000"/>
-                </a:solidFill>
-                <a:latin typeface="Inter"/>
-                <a:ea typeface="Inter"/>
-                <a:cs typeface="Inter"/>
-              </a:rPr>
-              <a:t>, </a:t>
-            </a:r>
-            <a:r>
-              <a:rPr lang="fr-FR" sz="1200" b="0" i="0" u="none" strike="noStrike" cap="none">
-                <a:solidFill>
-                  <a:srgbClr val="000000"/>
-                </a:solidFill>
-                <a:latin typeface="Inter"/>
-                <a:ea typeface="Inter"/>
-                <a:cs typeface="Inter"/>
-              </a:rPr>
-              <a:t>San Francisco</a:t>
-            </a:r>
-            <a:endParaRPr sz="1200" b="0" i="0" u="none" strike="noStrike" cap="none">
-              <a:solidFill>
-                <a:srgbClr val="000000"/>
-              </a:solidFill>
-              <a:latin typeface="Inter"/>
-              <a:ea typeface="Inter"/>
-              <a:cs typeface="Inter"/>
-            </a:endParaRPr>
-          </a:p>
-          <a:p>
-            <a:pPr marL="0" marR="0" lvl="0" indent="0" algn="l" rtl="0">
-              <a:lnSpc>
-                <a:spcPct val="100000"/>
-              </a:lnSpc>
-              <a:spcBef>
-                <a:spcPts val="0"/>
-              </a:spcBef>
-              <a:spcAft>
-                <a:spcPts val="0"/>
-              </a:spcAft>
-              <a:buClr>
-                <a:srgbClr val="000000"/>
-              </a:buClr>
-              <a:buSzPts val="1200"/>
-              <a:buFont typeface="Arial"/>
-              <a:buNone/>
-              <a:defRPr/>
-            </a:pPr>
-            <a:endParaRPr sz="1200" b="0" i="0" u="none" strike="noStrike" cap="none">
-              <a:solidFill>
-                <a:srgbClr val="000000"/>
-              </a:solidFill>
-              <a:latin typeface="Inter"/>
-              <a:ea typeface="Inter"/>
-              <a:cs typeface="Inter"/>
-            </a:endParaRPr>
-          </a:p>
-          <a:p>
-            <a:pPr marL="0" marR="0" lvl="0" indent="0" algn="l" rtl="0">
-              <a:lnSpc>
-                <a:spcPct val="100000"/>
-              </a:lnSpc>
-              <a:spcBef>
-                <a:spcPts val="0"/>
-              </a:spcBef>
-              <a:spcAft>
-                <a:spcPts val="0"/>
-              </a:spcAft>
-              <a:buClr>
-                <a:srgbClr val="000000"/>
-              </a:buClr>
-              <a:buSzPts val="1200"/>
-              <a:buFont typeface="Arial"/>
-              <a:buNone/>
-              <a:defRPr/>
-            </a:pPr>
-            <a:endParaRPr sz="1200" b="0" i="0" u="none" strike="noStrike" cap="none">
-              <a:solidFill>
-                <a:srgbClr val="000000"/>
-              </a:solidFill>
-              <a:latin typeface="Inter"/>
-              <a:ea typeface="Inter"/>
-              <a:cs typeface="Inter"/>
-            </a:endParaRPr>
-          </a:p>
-        </p:txBody>
-      </p:sp>
-      <p:sp>
-        <p:nvSpPr>
-          <p:cNvPr id="1835779142" name="Google Shape;85;p1"/>
-          <p:cNvSpPr txBox="1"/>
-          <p:nvPr/>
-        </p:nvSpPr>
-        <p:spPr bwMode="auto">
-          <a:xfrm flipH="0" flipV="0">
-            <a:off x="707632" y="2318105"/>
-            <a:ext cx="8085297" cy="667800"/>
-          </a:xfrm>
-          <a:prstGeom prst="rect">
-            <a:avLst/>
-          </a:prstGeom>
-          <a:noFill/>
-          <a:ln>
-            <a:noFill/>
-          </a:ln>
-        </p:spPr>
-        <p:txBody>
-          <a:bodyPr spcFirstLastPara="1" wrap="square" lIns="91424" tIns="91424" rIns="91424" bIns="91424" anchor="t" anchorCtr="0">
-            <a:noAutofit/>
-          </a:bodyPr>
-          <a:lstStyle/>
-          <a:p>
-            <a:pPr>
-              <a:defRPr/>
-            </a:pPr>
-            <a:r>
-              <a:rPr lang="en-US" sz="2400" b="0" i="0" u="none" strike="noStrike" cap="none">
-                <a:solidFill>
-                  <a:srgbClr val="FFF2CC"/>
-                </a:solidFill>
-                <a:latin typeface="Inter"/>
-                <a:ea typeface="Inter"/>
-                <a:cs typeface="Inter"/>
-              </a:rPr>
-              <a:t>Authors: </a:t>
-            </a:r>
-            <a:r>
-              <a:rPr lang="en-US" sz="2400" b="0" i="0" u="none" strike="noStrike" cap="none" spc="0">
-                <a:solidFill>
-                  <a:srgbClr val="FFF2CC"/>
-                </a:solidFill>
-                <a:latin typeface="Inter"/>
-                <a:ea typeface="Inter"/>
-                <a:cs typeface="Inter"/>
-              </a:rPr>
-              <a:t> </a:t>
-            </a:r>
-            <a:r>
-              <a:rPr lang="en-US" sz="2400" b="0" i="0" u="none" strike="noStrike" cap="none" spc="0">
-                <a:solidFill>
-                  <a:srgbClr val="FFF2CC"/>
-                </a:solidFill>
-                <a:latin typeface="Inter"/>
-                <a:ea typeface="Inter"/>
-                <a:cs typeface="Inter"/>
-              </a:rPr>
-              <a:t> D. Barthel</a:t>
-            </a:r>
-            <a:r>
-              <a:rPr lang="fr-FR" sz="2400" b="0" i="0" u="none" strike="noStrike" cap="none" spc="0">
-                <a:solidFill>
-                  <a:srgbClr val="FFF2CC"/>
-                </a:solidFill>
-                <a:latin typeface="Inter"/>
-                <a:ea typeface="Inter"/>
-                <a:cs typeface="Inter"/>
-              </a:rPr>
-              <a:t>, </a:t>
-            </a:r>
-            <a:r>
-              <a:rPr lang="en-US" sz="2400" b="0" i="0" u="none" strike="noStrike" cap="none" spc="0">
-                <a:solidFill>
-                  <a:srgbClr val="FFF2CC"/>
-                </a:solidFill>
-                <a:latin typeface="Inter"/>
-                <a:ea typeface="Inter"/>
-                <a:cs typeface="Inter"/>
-              </a:rPr>
-              <a:t>L. Toutain</a:t>
-            </a:r>
-            <a:r>
-              <a:rPr lang="fr-FR"/>
-              <a:t>, </a:t>
-            </a:r>
-            <a:r>
-              <a:rPr lang="en-US" sz="2400" b="0" i="0" u="none" strike="noStrike" cap="none" spc="0">
-                <a:solidFill>
-                  <a:srgbClr val="FFF2CC"/>
-                </a:solidFill>
-                <a:latin typeface="Inter"/>
-                <a:ea typeface="Inter"/>
-                <a:cs typeface="Inter"/>
-              </a:rPr>
-              <a:t>M. Dumay</a:t>
-            </a:r>
-            <a:endParaRPr lang="en-US" sz="2400" b="0" i="0" u="none" strike="noStrike" cap="none" spc="0">
-              <a:solidFill>
-                <a:srgbClr val="FFF2CC"/>
-              </a:solidFill>
-              <a:latin typeface="Inter"/>
-              <a:cs typeface="Inter"/>
-            </a:endParaRPr>
+            </a:fld>
+            <a:endParaRPr/>
           </a:p>
         </p:txBody>
       </p:sp>
       <p:pic>
         <p:nvPicPr>
-          <p:cNvPr id="1547866574" name="Google Shape;86;p1"/>
+          <p:cNvPr id="275577125" name="Google Shape;169;p9" descr="Capture d’écran 2026-09-28 à 10.35.07.png"/>
           <p:cNvPicPr/>
           <p:nvPr/>
         </p:nvPicPr>
@@ -14359,13 +16406,13 @@
           <a:blip r:embed="rId3">
             <a:alphaModFix/>
           </a:blip>
-          <a:srcRect l="9711" t="41600" r="22260" b="24843"/>
+          <a:srcRect l="0" t="0" r="0" b="0"/>
           <a:stretch/>
         </p:blipFill>
         <p:spPr bwMode="auto">
-          <a:xfrm>
-            <a:off x="3247924" y="4253648"/>
-            <a:ext cx="2861895" cy="767620"/>
+          <a:xfrm flipH="0" flipV="0">
+            <a:off x="4647218" y="194671"/>
+            <a:ext cx="4088209" cy="4331441"/>
           </a:xfrm>
           <a:prstGeom prst="rect">
             <a:avLst/>
@@ -14378,35 +16425,41 @@
       </p:pic>
       <p:sp>
         <p:nvSpPr>
-          <p:cNvPr id="1612573028" name="Google Shape;87;p1"/>
-          <p:cNvSpPr txBox="1"/>
+          <p:cNvPr id="1680397040" name="Google Shape;170;p9"/>
+          <p:cNvSpPr/>
           <p:nvPr/>
         </p:nvSpPr>
         <p:spPr bwMode="auto">
-          <a:xfrm>
-            <a:off x="707634" y="3178279"/>
-            <a:ext cx="5724900" cy="667800"/>
+          <a:xfrm flipH="0" flipV="0">
+            <a:off x="4825784" y="723065"/>
+            <a:ext cx="206613" cy="3654231"/>
           </a:xfrm>
           <a:prstGeom prst="rect">
             <a:avLst/>
           </a:prstGeom>
-          <a:noFill/>
+          <a:solidFill>
+            <a:schemeClr val="accent2">
+              <a:lumMod val="20000"/>
+              <a:lumOff val="80000"/>
+              <a:alpha val="56078"/>
+            </a:schemeClr>
+          </a:solidFill>
           <a:ln>
             <a:noFill/>
           </a:ln>
         </p:spPr>
         <p:txBody>
-          <a:bodyPr spcFirstLastPara="1" wrap="square" lIns="91424" tIns="91424" rIns="91424" bIns="91424" anchor="t" anchorCtr="0">
+          <a:bodyPr spcFirstLastPara="1" wrap="square" lIns="50799" tIns="50799" rIns="50799" bIns="50799" anchor="ctr" anchorCtr="0">
             <a:noAutofit/>
           </a:bodyPr>
           <a:lstStyle/>
           <a:p>
-            <a:pPr marL="0" marR="0" lvl="0" indent="0" algn="l" rtl="0">
+            <a:pPr marL="0" marR="0" lvl="0" indent="0" algn="ctr" rtl="0">
               <a:lnSpc>
-                <a:spcPct val="110000"/>
+                <a:spcPct val="100000"/>
               </a:lnSpc>
               <a:spcBef>
-                <a:spcPts val="300"/>
+                <a:spcPts val="0"/>
               </a:spcBef>
               <a:spcAft>
                 <a:spcPts val="0"/>
@@ -14414,30 +16467,456 @@
               <a:buClr>
                 <a:srgbClr val="000000"/>
               </a:buClr>
-              <a:buSzPts val="2400"/>
+              <a:buSzPts val="3200"/>
+              <a:buFont typeface="Helvetica Neue"/>
+              <a:buNone/>
+              <a:defRPr/>
+            </a:pPr>
+            <a:endParaRPr sz="3200" b="0" i="0" u="none" strike="noStrike" cap="none">
+              <a:solidFill>
+                <a:srgbClr val="000000"/>
+              </a:solidFill>
+              <a:latin typeface="Helvetica Neue"/>
+              <a:ea typeface="Helvetica Neue"/>
+              <a:cs typeface="Helvetica Neue"/>
+            </a:endParaRPr>
+          </a:p>
+        </p:txBody>
+      </p:sp>
+      <p:sp>
+        <p:nvSpPr>
+          <p:cNvPr id="654521828" name="Google Shape;171;p9"/>
+          <p:cNvSpPr/>
+          <p:nvPr/>
+        </p:nvSpPr>
+        <p:spPr bwMode="auto">
+          <a:xfrm flipH="0" flipV="0">
+            <a:off x="5103733" y="2360392"/>
+            <a:ext cx="871119" cy="1673724"/>
+          </a:xfrm>
+          <a:prstGeom prst="rect">
+            <a:avLst/>
+          </a:prstGeom>
+          <a:solidFill>
+            <a:schemeClr val="accent6">
+              <a:lumMod val="60000"/>
+              <a:lumOff val="40000"/>
+              <a:alpha val="47451"/>
+            </a:schemeClr>
+          </a:solidFill>
+          <a:ln>
+            <a:noFill/>
+          </a:ln>
+        </p:spPr>
+        <p:txBody>
+          <a:bodyPr spcFirstLastPara="1" wrap="square" lIns="50799" tIns="50799" rIns="50799" bIns="50799" anchor="ctr" anchorCtr="0">
+            <a:noAutofit/>
+          </a:bodyPr>
+          <a:lstStyle/>
+          <a:p>
+            <a:pPr marL="0" marR="0" lvl="0" indent="0" algn="ctr" rtl="0">
+              <a:lnSpc>
+                <a:spcPct val="100000"/>
+              </a:lnSpc>
+              <a:spcBef>
+                <a:spcPts val="0"/>
+              </a:spcBef>
+              <a:spcAft>
+                <a:spcPts val="0"/>
+              </a:spcAft>
+              <a:buClr>
+                <a:srgbClr val="000000"/>
+              </a:buClr>
+              <a:buSzPts val="3200"/>
+              <a:buFont typeface="Helvetica Neue"/>
+              <a:buNone/>
+              <a:defRPr/>
+            </a:pPr>
+            <a:endParaRPr sz="3200" b="0" i="0" u="none" strike="noStrike" cap="none">
+              <a:solidFill>
+                <a:srgbClr val="000000"/>
+              </a:solidFill>
+              <a:latin typeface="Helvetica Neue"/>
+              <a:ea typeface="Helvetica Neue"/>
+              <a:cs typeface="Helvetica Neue"/>
+            </a:endParaRPr>
+          </a:p>
+        </p:txBody>
+      </p:sp>
+      <p:sp>
+        <p:nvSpPr>
+          <p:cNvPr id="1408180399" name="Google Shape;172;p9"/>
+          <p:cNvSpPr/>
+          <p:nvPr/>
+        </p:nvSpPr>
+        <p:spPr bwMode="auto">
+          <a:xfrm>
+            <a:off x="16526517" y="9183541"/>
+            <a:ext cx="1655496" cy="683956"/>
+          </a:xfrm>
+          <a:prstGeom prst="rect">
+            <a:avLst/>
+          </a:prstGeom>
+          <a:solidFill>
+            <a:srgbClr val="60D937">
+              <a:alpha val="48235"/>
+            </a:srgbClr>
+          </a:solidFill>
+          <a:ln>
+            <a:noFill/>
+          </a:ln>
+        </p:spPr>
+        <p:txBody>
+          <a:bodyPr spcFirstLastPara="1" wrap="square" lIns="50799" tIns="50799" rIns="50799" bIns="50799" anchor="ctr" anchorCtr="0">
+            <a:noAutofit/>
+          </a:bodyPr>
+          <a:lstStyle/>
+          <a:p>
+            <a:pPr marL="0" marR="0" lvl="0" indent="0" algn="ctr" rtl="0">
+              <a:lnSpc>
+                <a:spcPct val="100000"/>
+              </a:lnSpc>
+              <a:spcBef>
+                <a:spcPts val="0"/>
+              </a:spcBef>
+              <a:spcAft>
+                <a:spcPts val="0"/>
+              </a:spcAft>
+              <a:buClr>
+                <a:srgbClr val="000000"/>
+              </a:buClr>
+              <a:buSzPts val="3200"/>
+              <a:buFont typeface="Helvetica Neue"/>
+              <a:buNone/>
+              <a:defRPr/>
+            </a:pPr>
+            <a:endParaRPr sz="3200" b="0" i="0" u="none" strike="noStrike" cap="none">
+              <a:solidFill>
+                <a:srgbClr val="000000"/>
+              </a:solidFill>
+              <a:latin typeface="Helvetica Neue"/>
+              <a:ea typeface="Helvetica Neue"/>
+              <a:cs typeface="Helvetica Neue"/>
+            </a:endParaRPr>
+          </a:p>
+        </p:txBody>
+      </p:sp>
+      <p:sp>
+        <p:nvSpPr>
+          <p:cNvPr id="622774711" name="Google Shape;174;p9"/>
+          <p:cNvSpPr/>
+          <p:nvPr/>
+        </p:nvSpPr>
+        <p:spPr bwMode="auto">
+          <a:xfrm>
+            <a:off x="18323399" y="7592215"/>
+            <a:ext cx="1133339" cy="594947"/>
+          </a:xfrm>
+          <a:prstGeom prst="rect">
+            <a:avLst/>
+          </a:prstGeom>
+          <a:solidFill>
+            <a:schemeClr val="accent6">
+              <a:alpha val="43529"/>
+            </a:schemeClr>
+          </a:solidFill>
+          <a:ln>
+            <a:noFill/>
+          </a:ln>
+        </p:spPr>
+        <p:txBody>
+          <a:bodyPr spcFirstLastPara="1" wrap="square" lIns="50799" tIns="50799" rIns="50799" bIns="50799" anchor="ctr" anchorCtr="0">
+            <a:noAutofit/>
+          </a:bodyPr>
+          <a:lstStyle/>
+          <a:p>
+            <a:pPr marL="0" marR="0" lvl="0" indent="0" algn="ctr" rtl="0">
+              <a:lnSpc>
+                <a:spcPct val="100000"/>
+              </a:lnSpc>
+              <a:spcBef>
+                <a:spcPts val="0"/>
+              </a:spcBef>
+              <a:spcAft>
+                <a:spcPts val="0"/>
+              </a:spcAft>
+              <a:buClr>
+                <a:srgbClr val="FFFFFF"/>
+              </a:buClr>
+              <a:buSzPts val="3200"/>
+              <a:buFont typeface="Helvetica Neue"/>
+              <a:buNone/>
+              <a:defRPr/>
+            </a:pPr>
+            <a:endParaRPr sz="3200" b="0" i="0" u="none" strike="noStrike" cap="none">
+              <a:solidFill>
+                <a:srgbClr val="FFFFFF"/>
+              </a:solidFill>
+              <a:latin typeface="Helvetica Neue"/>
+              <a:ea typeface="Helvetica Neue"/>
+              <a:cs typeface="Helvetica Neue"/>
+            </a:endParaRPr>
+          </a:p>
+        </p:txBody>
+      </p:sp>
+      <p:sp>
+        <p:nvSpPr>
+          <p:cNvPr id="1898421982" name="Google Shape;171;p9"/>
+          <p:cNvSpPr/>
+          <p:nvPr/>
+        </p:nvSpPr>
+        <p:spPr bwMode="auto">
+          <a:xfrm flipH="0" flipV="0">
+            <a:off x="5103733" y="4034117"/>
+            <a:ext cx="871119" cy="343180"/>
+          </a:xfrm>
+          <a:prstGeom prst="rect">
+            <a:avLst/>
+          </a:prstGeom>
+          <a:solidFill>
+            <a:schemeClr val="accent6">
+              <a:lumMod val="20000"/>
+              <a:lumOff val="80000"/>
+              <a:alpha val="47451"/>
+            </a:schemeClr>
+          </a:solidFill>
+          <a:ln>
+            <a:noFill/>
+          </a:ln>
+        </p:spPr>
+        <p:txBody>
+          <a:bodyPr spcFirstLastPara="1" wrap="square" lIns="50799" tIns="50799" rIns="50799" bIns="50799" anchor="ctr" anchorCtr="0">
+            <a:noAutofit/>
+          </a:bodyPr>
+          <a:lstStyle/>
+          <a:p>
+            <a:pPr marL="0" marR="0" lvl="0" indent="0" algn="ctr" rtl="0">
+              <a:lnSpc>
+                <a:spcPct val="100000"/>
+              </a:lnSpc>
+              <a:spcBef>
+                <a:spcPts val="0"/>
+              </a:spcBef>
+              <a:spcAft>
+                <a:spcPts val="0"/>
+              </a:spcAft>
+              <a:buClr>
+                <a:srgbClr val="000000"/>
+              </a:buClr>
+              <a:buSzPts val="3200"/>
+              <a:buFont typeface="Helvetica Neue"/>
+              <a:buNone/>
+              <a:defRPr/>
+            </a:pPr>
+            <a:endParaRPr sz="3200" b="0" i="0" u="none" strike="noStrike" cap="none">
+              <a:solidFill>
+                <a:srgbClr val="000000"/>
+              </a:solidFill>
+              <a:latin typeface="Helvetica Neue"/>
+              <a:ea typeface="Helvetica Neue"/>
+              <a:cs typeface="Helvetica Neue"/>
+            </a:endParaRPr>
+          </a:p>
+        </p:txBody>
+      </p:sp>
+      <p:sp>
+        <p:nvSpPr>
+          <p:cNvPr id="1871516884" name="Google Shape;171;p9"/>
+          <p:cNvSpPr/>
+          <p:nvPr/>
+        </p:nvSpPr>
+        <p:spPr bwMode="auto">
+          <a:xfrm flipH="0" flipV="0">
+            <a:off x="6051893" y="2072728"/>
+            <a:ext cx="567297" cy="343179"/>
+          </a:xfrm>
+          <a:prstGeom prst="rect">
+            <a:avLst/>
+          </a:prstGeom>
+          <a:solidFill>
+            <a:schemeClr val="accent3">
+              <a:lumMod val="20000"/>
+              <a:lumOff val="80000"/>
+              <a:alpha val="47451"/>
+            </a:schemeClr>
+          </a:solidFill>
+          <a:ln>
+            <a:noFill/>
+          </a:ln>
+        </p:spPr>
+        <p:txBody>
+          <a:bodyPr spcFirstLastPara="1" wrap="square" lIns="50799" tIns="50799" rIns="50799" bIns="50799" anchor="ctr" anchorCtr="0">
+            <a:noAutofit/>
+          </a:bodyPr>
+          <a:lstStyle/>
+          <a:p>
+            <a:pPr marL="0" marR="0" lvl="0" indent="0" algn="ctr" rtl="0">
+              <a:lnSpc>
+                <a:spcPct val="100000"/>
+              </a:lnSpc>
+              <a:spcBef>
+                <a:spcPts val="0"/>
+              </a:spcBef>
+              <a:spcAft>
+                <a:spcPts val="0"/>
+              </a:spcAft>
+              <a:buClr>
+                <a:srgbClr val="000000"/>
+              </a:buClr>
+              <a:buSzPts val="3200"/>
+              <a:buFont typeface="Helvetica Neue"/>
+              <a:buNone/>
+              <a:defRPr/>
+            </a:pPr>
+            <a:endParaRPr sz="3200" b="0" i="0" u="none" strike="noStrike" cap="none">
+              <a:solidFill>
+                <a:srgbClr val="000000"/>
+              </a:solidFill>
+              <a:latin typeface="Helvetica Neue"/>
+              <a:ea typeface="Helvetica Neue"/>
+              <a:cs typeface="Helvetica Neue"/>
+            </a:endParaRPr>
+          </a:p>
+        </p:txBody>
+      </p:sp>
+      <p:sp>
+        <p:nvSpPr>
+          <p:cNvPr id="1392942281" name="Google Shape;171;p9"/>
+          <p:cNvSpPr/>
+          <p:nvPr/>
+        </p:nvSpPr>
+        <p:spPr bwMode="auto">
+          <a:xfrm flipH="0" flipV="0">
+            <a:off x="6051893" y="3107590"/>
+            <a:ext cx="567297" cy="343179"/>
+          </a:xfrm>
+          <a:prstGeom prst="rect">
+            <a:avLst/>
+          </a:prstGeom>
+          <a:solidFill>
+            <a:schemeClr val="accent3">
+              <a:lumMod val="20000"/>
+              <a:lumOff val="80000"/>
+              <a:alpha val="47451"/>
+            </a:schemeClr>
+          </a:solidFill>
+          <a:ln>
+            <a:noFill/>
+          </a:ln>
+        </p:spPr>
+        <p:txBody>
+          <a:bodyPr spcFirstLastPara="1" wrap="square" lIns="50799" tIns="50799" rIns="50799" bIns="50799" anchor="ctr" anchorCtr="0">
+            <a:noAutofit/>
+          </a:bodyPr>
+          <a:lstStyle/>
+          <a:p>
+            <a:pPr marL="0" marR="0" lvl="0" indent="0" algn="ctr" rtl="0">
+              <a:lnSpc>
+                <a:spcPct val="100000"/>
+              </a:lnSpc>
+              <a:spcBef>
+                <a:spcPts val="0"/>
+              </a:spcBef>
+              <a:spcAft>
+                <a:spcPts val="0"/>
+              </a:spcAft>
+              <a:buClr>
+                <a:srgbClr val="000000"/>
+              </a:buClr>
+              <a:buSzPts val="3200"/>
+              <a:buFont typeface="Helvetica Neue"/>
+              <a:buNone/>
+              <a:defRPr/>
+            </a:pPr>
+            <a:endParaRPr sz="3200" b="0" i="0" u="none" strike="noStrike" cap="none">
+              <a:solidFill>
+                <a:srgbClr val="000000"/>
+              </a:solidFill>
+              <a:latin typeface="Helvetica Neue"/>
+              <a:ea typeface="Helvetica Neue"/>
+              <a:cs typeface="Helvetica Neue"/>
+            </a:endParaRPr>
+          </a:p>
+        </p:txBody>
+      </p:sp>
+      <p:sp>
+        <p:nvSpPr>
+          <p:cNvPr id="732869143" name="Rectangle 11"/>
+          <p:cNvSpPr txBox="1"/>
+          <p:nvPr/>
+        </p:nvSpPr>
+        <p:spPr bwMode="auto">
+          <a:xfrm rot="0" flipH="0" flipV="0">
+            <a:off x="412905" y="2814758"/>
+            <a:ext cx="2584914" cy="1158599"/>
+          </a:xfrm>
+          <a:prstGeom prst="rect">
+            <a:avLst/>
+          </a:prstGeom>
+          <a:solidFill>
+            <a:schemeClr val="accent6">
+              <a:lumMod val="20000"/>
+              <a:lumOff val="80000"/>
+            </a:schemeClr>
+          </a:solidFill>
+        </p:spPr>
+        <p:txBody>
+          <a:bodyPr vertOverflow="overflow" horzOverflow="overflow" vert="horz" wrap="none" lIns="91440" tIns="45720" rIns="91440" bIns="45720" numCol="1" spcCol="0" rtlCol="0" fromWordArt="0" anchor="t" anchorCtr="0" forceAA="0" upright="0" compatLnSpc="0">
+            <a:spAutoFit/>
+          </a:bodyPr>
+          <a:p>
+            <a:pPr>
+              <a:defRPr/>
+            </a:pPr>
+            <a:r>
+              <a:rPr lang="fr-FR"/>
+              <a:t>FID is either :</a:t>
+            </a:r>
+            <a:endParaRPr lang="fr-FR"/>
+          </a:p>
+          <a:p>
+            <a:pPr marL="239820" indent="-239820">
               <a:buFont typeface="Arial"/>
-              <a:buNone/>
-              <a:defRPr/>
-            </a:pPr>
-            <a:r>
-              <a:rPr lang="en-US" sz="2400" b="0" i="0" u="none" strike="noStrike" cap="none">
-                <a:solidFill>
-                  <a:srgbClr val="FFF2CC"/>
-                </a:solidFill>
-                <a:latin typeface="Inter"/>
-                <a:ea typeface="Inter"/>
-                <a:cs typeface="Inter"/>
-              </a:rPr>
-              <a:t>Presenter: L. Toutain</a:t>
-            </a:r>
-            <a:endParaRPr sz="2400" b="0" i="0" u="none" strike="noStrike" cap="none">
-              <a:solidFill>
-                <a:srgbClr val="FFF2CC"/>
-              </a:solidFill>
-              <a:latin typeface="Inter"/>
-              <a:ea typeface="Inter"/>
-              <a:cs typeface="Inter"/>
-            </a:endParaRPr>
+              <a:buChar char="•"/>
+              <a:defRPr/>
+            </a:pPr>
+            <a:r>
+              <a:rPr lang="fr-FR"/>
+              <a:t>Fid-*</a:t>
+            </a:r>
+            <a:endParaRPr lang="fr-FR"/>
+          </a:p>
+          <a:p>
+            <a:pPr marL="239820" indent="-239820">
+              <a:buFont typeface="Arial"/>
+              <a:buChar char="•"/>
+              <a:defRPr/>
+            </a:pPr>
+            <a:r>
+              <a:rPr lang="fr-FR"/>
+              <a:t>Space-id, option</a:t>
+            </a:r>
+            <a:endParaRPr lang="fr-FR"/>
+          </a:p>
+          <a:p>
+            <a:pPr>
+              <a:defRPr/>
+            </a:pPr>
+            <a:r>
+              <a:rPr lang="fr-FR"/>
+              <a:t>Old CoAP FID are deprecated</a:t>
+            </a:r>
+            <a:endParaRPr lang="fr-FR"/>
+          </a:p>
+          <a:p>
+            <a:pPr>
+              <a:defRPr/>
+            </a:pPr>
+            <a:r>
+              <a:rPr lang="fr-FR"/>
+              <a:t>Sub-fields for OSCORE option</a:t>
+            </a:r>
+            <a:endParaRPr/>
           </a:p>
         </p:txBody>
       </p:sp>
@@ -14476,13 +16955,17 @@
       </p:grpSpPr>
       <p:sp>
         <p:nvSpPr>
-          <p:cNvPr id="308154885" name="Google Shape;17;p7"/>
+          <p:cNvPr id="492599773" name="Google Shape;82;p1"/>
           <p:cNvSpPr txBox="1"/>
           <p:nvPr>
-            <p:ph type="body" idx="1"/>
+            <p:ph type="title"/>
           </p:nvPr>
         </p:nvSpPr>
         <p:spPr bwMode="auto">
+          <a:xfrm flipH="0" flipV="0">
+            <a:off x="1410498" y="1119273"/>
+            <a:ext cx="7028298" cy="933598"/>
+          </a:xfrm>
           <a:prstGeom prst="rect">
             <a:avLst/>
           </a:prstGeom>
@@ -14492,25 +16975,55 @@
           </a:ln>
         </p:spPr>
         <p:txBody>
-          <a:bodyPr/>
+          <a:bodyPr spcFirstLastPara="1" wrap="square" lIns="91398" tIns="91398" rIns="91398" bIns="91398" anchor="b" anchorCtr="0">
+            <a:noAutofit/>
+          </a:bodyPr>
           <a:lstStyle/>
           <a:p>
-            <a:pPr>
-              <a:defRPr/>
-            </a:pPr>
-            <a:endParaRPr/>
+            <a:pPr marL="0" marR="0" lvl="0" indent="0" algn="l" rtl="0">
+              <a:lnSpc>
+                <a:spcPct val="100000"/>
+              </a:lnSpc>
+              <a:spcBef>
+                <a:spcPts val="0"/>
+              </a:spcBef>
+              <a:spcAft>
+                <a:spcPts val="0"/>
+              </a:spcAft>
+              <a:buClr>
+                <a:srgbClr val="FFFFFF"/>
+              </a:buClr>
+              <a:buSzPts val="4200"/>
+              <a:buFont typeface="Open Sans"/>
+              <a:buNone/>
+              <a:defRPr/>
+            </a:pPr>
+            <a:r>
+              <a:rPr lang="en-US" sz="3600" b="0" i="0" u="none" strike="noStrike" cap="none" spc="0">
+                <a:solidFill>
+                  <a:srgbClr val="FFFFFF"/>
+                </a:solidFill>
+                <a:latin typeface="Inter"/>
+                <a:ea typeface="Inter"/>
+                <a:cs typeface="Inter"/>
+              </a:rPr>
+              <a:t>draft-ietf-schc-icmpv6-compression-03</a:t>
+            </a:r>
+            <a:endParaRPr sz="3600"/>
           </a:p>
         </p:txBody>
       </p:sp>
       <p:sp>
         <p:nvSpPr>
-          <p:cNvPr id="1602270621" name="Google Shape;18;p7"/>
+          <p:cNvPr id="1452763923" name="Google Shape;83;p1"/>
           <p:cNvSpPr txBox="1"/>
-          <p:nvPr>
-            <p:ph type="sldNum" idx="12"/>
-          </p:nvPr>
+          <p:nvPr/>
         </p:nvSpPr>
         <p:spPr bwMode="auto">
+          <a:xfrm>
+            <a:off x="486916" y="254439"/>
+            <a:ext cx="4986900" cy="522900"/>
+          </a:xfrm>
           <a:prstGeom prst="rect">
             <a:avLst/>
           </a:prstGeom>
@@ -14520,24 +17033,435 @@
           </a:ln>
         </p:spPr>
         <p:txBody>
-          <a:bodyPr/>
+          <a:bodyPr spcFirstLastPara="1" wrap="square" lIns="91399" tIns="91399" rIns="91399" bIns="91399" anchor="t" anchorCtr="0">
+            <a:noAutofit/>
+          </a:bodyPr>
           <a:lstStyle/>
           <a:p>
-            <a:pPr marL="0" lvl="0" indent="0" algn="r" rtl="0">
+            <a:pPr marL="0" marR="0" lvl="0" indent="0" algn="l" rtl="0">
+              <a:lnSpc>
+                <a:spcPct val="100000"/>
+              </a:lnSpc>
               <a:spcBef>
                 <a:spcPts val="0"/>
               </a:spcBef>
               <a:spcAft>
                 <a:spcPts val="0"/>
               </a:spcAft>
+              <a:buClr>
+                <a:srgbClr val="FFFFFF"/>
+              </a:buClr>
+              <a:buSzPts val="2400"/>
+              <a:buFont typeface="Montserrat"/>
               <a:buNone/>
               <a:defRPr/>
             </a:pPr>
-            <a:fld id="{DBB77244-5EC1-7B83-9BBA-D3F58816C736}" type="slidenum">
-              <a:rPr lang="en-US"/>
+            <a:r>
+              <a:rPr lang="fr-FR" sz="2100" b="0" i="0" u="none" strike="noStrike" cap="none">
+                <a:solidFill>
+                  <a:srgbClr val="FFFFFF"/>
+                </a:solidFill>
+                <a:latin typeface="Inter"/>
+                <a:ea typeface="Inter"/>
+                <a:cs typeface="Inter"/>
+              </a:rPr>
+              <a:t>Nov </a:t>
+            </a:r>
+            <a:r>
+              <a:rPr lang="fr-FR" sz="2100" b="0" i="0" u="none" strike="noStrike" cap="none">
+                <a:solidFill>
+                  <a:srgbClr val="FFFFFF"/>
+                </a:solidFill>
+                <a:latin typeface="Inter"/>
+                <a:ea typeface="Inter"/>
+                <a:cs typeface="Inter"/>
+              </a:rPr>
+              <a:t>17</a:t>
+            </a:r>
+            <a:r>
+              <a:rPr lang="en-US" sz="2100" b="0" i="0" u="none" strike="noStrike" cap="none" baseline="30000">
+                <a:solidFill>
+                  <a:srgbClr val="FFFFFF"/>
+                </a:solidFill>
+                <a:latin typeface="Inter"/>
+                <a:ea typeface="Inter"/>
+                <a:cs typeface="Inter"/>
+              </a:rPr>
+              <a:t>th</a:t>
+            </a:r>
+            <a:r>
+              <a:rPr lang="en-US" sz="2100" b="0" i="0" u="none" strike="noStrike" cap="none">
+                <a:solidFill>
+                  <a:srgbClr val="FFFFFF"/>
+                </a:solidFill>
+                <a:latin typeface="Inter"/>
+                <a:ea typeface="Inter"/>
+                <a:cs typeface="Inter"/>
+              </a:rPr>
+              <a:t>, 2026</a:t>
+            </a:r>
+            <a:endParaRPr sz="1100" b="0" i="0" u="none" strike="noStrike" cap="none">
+              <a:solidFill>
+                <a:srgbClr val="000000"/>
+              </a:solidFill>
+              <a:latin typeface="Inter"/>
+              <a:ea typeface="Inter"/>
+              <a:cs typeface="Inter"/>
+            </a:endParaRPr>
+          </a:p>
+        </p:txBody>
+      </p:sp>
+      <p:sp>
+        <p:nvSpPr>
+          <p:cNvPr id="881058420" name="Google Shape;84;p1"/>
+          <p:cNvSpPr txBox="1"/>
+          <p:nvPr/>
+        </p:nvSpPr>
+        <p:spPr bwMode="auto">
+          <a:xfrm>
+            <a:off x="191741" y="4416808"/>
+            <a:ext cx="3783600" cy="441299"/>
+          </a:xfrm>
+          <a:prstGeom prst="rect">
+            <a:avLst/>
+          </a:prstGeom>
+          <a:noFill/>
+          <a:ln>
+            <a:noFill/>
+          </a:ln>
+        </p:spPr>
+        <p:txBody>
+          <a:bodyPr spcFirstLastPara="1" wrap="square" lIns="91423" tIns="91423" rIns="91423" bIns="91423" anchor="t" anchorCtr="0">
+            <a:noAutofit/>
+          </a:bodyPr>
+          <a:lstStyle/>
+          <a:p>
+            <a:pPr marL="0" marR="0" lvl="0" indent="0" algn="l" rtl="0">
+              <a:lnSpc>
+                <a:spcPct val="100000"/>
+              </a:lnSpc>
+              <a:spcBef>
+                <a:spcPts val="0"/>
+              </a:spcBef>
+              <a:spcAft>
+                <a:spcPts val="0"/>
+              </a:spcAft>
+              <a:buClr>
+                <a:srgbClr val="000000"/>
+              </a:buClr>
+              <a:buSzPts val="1200"/>
+              <a:buFont typeface="Arial"/>
+              <a:buNone/>
+              <a:defRPr/>
+            </a:pPr>
+            <a:r>
+              <a:rPr lang="en-US" sz="1200" b="0" i="0" u="none" strike="noStrike" cap="none">
+                <a:solidFill>
+                  <a:srgbClr val="000000"/>
+                </a:solidFill>
+                <a:latin typeface="Inter"/>
+                <a:ea typeface="Inter"/>
+                <a:cs typeface="Inter"/>
+              </a:rPr>
+              <a:t>IETF 12</a:t>
+            </a:r>
+            <a:r>
+              <a:rPr lang="fr-FR" sz="1200" b="0" i="0" u="none" strike="noStrike" cap="none">
+                <a:solidFill>
+                  <a:srgbClr val="000000"/>
+                </a:solidFill>
+                <a:latin typeface="Inter"/>
+                <a:ea typeface="Inter"/>
+                <a:cs typeface="Inter"/>
+              </a:rPr>
               <a:t>7</a:t>
-            </a:fld>
-            <a:endParaRPr/>
+            </a:r>
+            <a:r>
+              <a:rPr lang="en-US" sz="1200" b="0" i="0" u="none" strike="noStrike" cap="none">
+                <a:solidFill>
+                  <a:srgbClr val="000000"/>
+                </a:solidFill>
+                <a:latin typeface="Inter"/>
+                <a:ea typeface="Inter"/>
+                <a:cs typeface="Inter"/>
+              </a:rPr>
+              <a:t>, </a:t>
+            </a:r>
+            <a:r>
+              <a:rPr lang="fr-FR" sz="1200" b="0" i="0" u="none" strike="noStrike" cap="none">
+                <a:solidFill>
+                  <a:srgbClr val="000000"/>
+                </a:solidFill>
+                <a:latin typeface="Inter"/>
+                <a:ea typeface="Inter"/>
+                <a:cs typeface="Inter"/>
+              </a:rPr>
+              <a:t>San Francisco</a:t>
+            </a:r>
+            <a:endParaRPr sz="1200" b="0" i="0" u="none" strike="noStrike" cap="none">
+              <a:solidFill>
+                <a:srgbClr val="000000"/>
+              </a:solidFill>
+              <a:latin typeface="Inter"/>
+              <a:ea typeface="Inter"/>
+              <a:cs typeface="Inter"/>
+            </a:endParaRPr>
+          </a:p>
+          <a:p>
+            <a:pPr marL="0" marR="0" lvl="0" indent="0" algn="l" rtl="0">
+              <a:lnSpc>
+                <a:spcPct val="100000"/>
+              </a:lnSpc>
+              <a:spcBef>
+                <a:spcPts val="0"/>
+              </a:spcBef>
+              <a:spcAft>
+                <a:spcPts val="0"/>
+              </a:spcAft>
+              <a:buClr>
+                <a:srgbClr val="000000"/>
+              </a:buClr>
+              <a:buSzPts val="1200"/>
+              <a:buFont typeface="Arial"/>
+              <a:buNone/>
+              <a:defRPr/>
+            </a:pPr>
+            <a:endParaRPr sz="1200" b="0" i="0" u="none" strike="noStrike" cap="none">
+              <a:solidFill>
+                <a:srgbClr val="000000"/>
+              </a:solidFill>
+              <a:latin typeface="Inter"/>
+              <a:ea typeface="Inter"/>
+              <a:cs typeface="Inter"/>
+            </a:endParaRPr>
+          </a:p>
+          <a:p>
+            <a:pPr marL="0" marR="0" lvl="0" indent="0" algn="l" rtl="0">
+              <a:lnSpc>
+                <a:spcPct val="100000"/>
+              </a:lnSpc>
+              <a:spcBef>
+                <a:spcPts val="0"/>
+              </a:spcBef>
+              <a:spcAft>
+                <a:spcPts val="0"/>
+              </a:spcAft>
+              <a:buClr>
+                <a:srgbClr val="000000"/>
+              </a:buClr>
+              <a:buSzPts val="1200"/>
+              <a:buFont typeface="Arial"/>
+              <a:buNone/>
+              <a:defRPr/>
+            </a:pPr>
+            <a:endParaRPr sz="1200" b="0" i="0" u="none" strike="noStrike" cap="none">
+              <a:solidFill>
+                <a:srgbClr val="000000"/>
+              </a:solidFill>
+              <a:latin typeface="Inter"/>
+              <a:ea typeface="Inter"/>
+              <a:cs typeface="Inter"/>
+            </a:endParaRPr>
+          </a:p>
+        </p:txBody>
+      </p:sp>
+      <p:sp>
+        <p:nvSpPr>
+          <p:cNvPr id="1754746203" name="Google Shape;85;p1"/>
+          <p:cNvSpPr txBox="1"/>
+          <p:nvPr/>
+        </p:nvSpPr>
+        <p:spPr bwMode="auto">
+          <a:xfrm flipH="0" flipV="0">
+            <a:off x="707632" y="2318105"/>
+            <a:ext cx="8085297" cy="667800"/>
+          </a:xfrm>
+          <a:prstGeom prst="rect">
+            <a:avLst/>
+          </a:prstGeom>
+          <a:noFill/>
+          <a:ln>
+            <a:noFill/>
+          </a:ln>
+        </p:spPr>
+        <p:txBody>
+          <a:bodyPr spcFirstLastPara="1" wrap="square" lIns="91423" tIns="91423" rIns="91423" bIns="91423" anchor="t" anchorCtr="0">
+            <a:noAutofit/>
+          </a:bodyPr>
+          <a:lstStyle/>
+          <a:p>
+            <a:pPr>
+              <a:defRPr/>
+            </a:pPr>
+            <a:r>
+              <a:rPr lang="en-US" sz="2400" b="0" i="0" u="none" strike="noStrike" cap="none">
+                <a:solidFill>
+                  <a:srgbClr val="FFF2CC"/>
+                </a:solidFill>
+                <a:latin typeface="Inter"/>
+                <a:ea typeface="Inter"/>
+                <a:cs typeface="Inter"/>
+              </a:rPr>
+              <a:t>Authors: </a:t>
+            </a:r>
+            <a:r>
+              <a:rPr lang="en-US" sz="2400" b="0" i="0" u="none" strike="noStrike" cap="none" spc="0">
+                <a:solidFill>
+                  <a:srgbClr val="FFF2CC"/>
+                </a:solidFill>
+                <a:latin typeface="Inter"/>
+                <a:ea typeface="Inter"/>
+                <a:cs typeface="Inter"/>
+              </a:rPr>
+              <a:t> </a:t>
+            </a:r>
+            <a:r>
+              <a:rPr lang="en-US" sz="2400" b="0" i="0" u="none" strike="noStrike" cap="none" spc="0">
+                <a:solidFill>
+                  <a:srgbClr val="FFF2CC"/>
+                </a:solidFill>
+                <a:latin typeface="Inter"/>
+                <a:ea typeface="Inter"/>
+                <a:cs typeface="Inter"/>
+              </a:rPr>
+              <a:t> D. Barthel</a:t>
+            </a:r>
+            <a:r>
+              <a:rPr lang="fr-FR" sz="2400" b="0" i="0" u="none" strike="noStrike" cap="none" spc="0">
+                <a:solidFill>
+                  <a:srgbClr val="FFF2CC"/>
+                </a:solidFill>
+                <a:latin typeface="Inter"/>
+                <a:ea typeface="Inter"/>
+                <a:cs typeface="Inter"/>
+              </a:rPr>
+              <a:t>, </a:t>
+            </a:r>
+            <a:r>
+              <a:rPr lang="en-US" sz="2400" b="0" i="0" u="none" strike="noStrike" cap="none" spc="0">
+                <a:solidFill>
+                  <a:srgbClr val="FFF2CC"/>
+                </a:solidFill>
+                <a:latin typeface="Inter"/>
+                <a:ea typeface="Inter"/>
+                <a:cs typeface="Inter"/>
+              </a:rPr>
+              <a:t>L. Toutain</a:t>
+            </a:r>
+            <a:r>
+              <a:rPr lang="fr-FR"/>
+              <a:t>, </a:t>
+            </a:r>
+            <a:r>
+              <a:rPr lang="en-US" sz="2400" b="0" i="0" u="none" strike="noStrike" cap="none" spc="0">
+                <a:solidFill>
+                  <a:srgbClr val="FFF2CC"/>
+                </a:solidFill>
+                <a:latin typeface="Inter"/>
+                <a:ea typeface="Inter"/>
+                <a:cs typeface="Inter"/>
+              </a:rPr>
+              <a:t>M. Dumay</a:t>
+            </a:r>
+            <a:endParaRPr lang="en-US" sz="2400" b="0" i="0" u="none" strike="noStrike" cap="none" spc="0">
+              <a:solidFill>
+                <a:srgbClr val="FFF2CC"/>
+              </a:solidFill>
+              <a:latin typeface="Inter"/>
+              <a:cs typeface="Inter"/>
+            </a:endParaRPr>
+          </a:p>
+        </p:txBody>
+      </p:sp>
+      <p:pic>
+        <p:nvPicPr>
+          <p:cNvPr id="1974575014" name="Google Shape;86;p1"/>
+          <p:cNvPicPr/>
+          <p:nvPr/>
+        </p:nvPicPr>
+        <p:blipFill rotWithShape="1">
+          <a:blip r:embed="rId3">
+            <a:alphaModFix/>
+          </a:blip>
+          <a:srcRect l="9711" t="41600" r="22260" b="24843"/>
+          <a:stretch/>
+        </p:blipFill>
+        <p:spPr bwMode="auto">
+          <a:xfrm>
+            <a:off x="3247924" y="4253648"/>
+            <a:ext cx="2861895" cy="767620"/>
+          </a:xfrm>
+          <a:prstGeom prst="rect">
+            <a:avLst/>
+          </a:prstGeom>
+          <a:noFill/>
+          <a:ln>
+            <a:noFill/>
+          </a:ln>
+        </p:spPr>
+      </p:pic>
+      <p:sp>
+        <p:nvSpPr>
+          <p:cNvPr id="606190969" name="Google Shape;87;p1"/>
+          <p:cNvSpPr txBox="1"/>
+          <p:nvPr/>
+        </p:nvSpPr>
+        <p:spPr bwMode="auto">
+          <a:xfrm>
+            <a:off x="707634" y="3178279"/>
+            <a:ext cx="5724900" cy="667800"/>
+          </a:xfrm>
+          <a:prstGeom prst="rect">
+            <a:avLst/>
+          </a:prstGeom>
+          <a:noFill/>
+          <a:ln>
+            <a:noFill/>
+          </a:ln>
+        </p:spPr>
+        <p:txBody>
+          <a:bodyPr spcFirstLastPara="1" wrap="square" lIns="91423" tIns="91423" rIns="91423" bIns="91423" anchor="t" anchorCtr="0">
+            <a:noAutofit/>
+          </a:bodyPr>
+          <a:lstStyle/>
+          <a:p>
+            <a:pPr marL="0" marR="0" lvl="0" indent="0" algn="l" rtl="0">
+              <a:lnSpc>
+                <a:spcPct val="110000"/>
+              </a:lnSpc>
+              <a:spcBef>
+                <a:spcPts val="300"/>
+              </a:spcBef>
+              <a:spcAft>
+                <a:spcPts val="0"/>
+              </a:spcAft>
+              <a:buClr>
+                <a:srgbClr val="000000"/>
+              </a:buClr>
+              <a:buSzPts val="2400"/>
+              <a:buFont typeface="Arial"/>
+              <a:buNone/>
+              <a:defRPr/>
+            </a:pPr>
+            <a:r>
+              <a:rPr lang="en-US" sz="2400" b="0" i="0" u="none" strike="noStrike" cap="none">
+                <a:solidFill>
+                  <a:srgbClr val="FFF2CC"/>
+                </a:solidFill>
+                <a:latin typeface="Inter"/>
+                <a:ea typeface="Inter"/>
+                <a:cs typeface="Inter"/>
+              </a:rPr>
+              <a:t>Presenter: L. Toutain</a:t>
+            </a:r>
+            <a:endParaRPr sz="2400" b="0" i="0" u="none" strike="noStrike" cap="none">
+              <a:solidFill>
+                <a:srgbClr val="FFF2CC"/>
+              </a:solidFill>
+              <a:latin typeface="Inter"/>
+              <a:ea typeface="Inter"/>
+              <a:cs typeface="Inter"/>
+            </a:endParaRPr>
           </a:p>
         </p:txBody>
       </p:sp>
